--- a/outputs/produkte/mama-ceo/03-praesentationen/saeule-2/02-lektion-2-2.pptx
+++ b/outputs/produkte/mama-ceo/03-praesentationen/saeule-2/02-lektion-2-2.pptx
@@ -4,6 +4,9 @@
   <p:sldMasterIdLst>
     <p:sldMasterId id="2147483648" r:id="rId1"/>
   </p:sldMasterIdLst>
+  <p:notesMasterIdLst>
+    <p:notesMasterId r:id="rId12"/>
+  </p:notesMasterIdLst>
   <p:sldIdLst>
     <p:sldId id="256" r:id="rId2"/>
     <p:sldId id="257" r:id="rId3"/>
@@ -16,10 +19,7 @@
     <p:sldId id="264" r:id="rId10"/>
     <p:sldId id="265" r:id="rId11"/>
   </p:sldIdLst>
-  <p:notesMasterIdLst>
-    <p:notesMasterId r:id="rId12"/>
-  </p:notesMasterIdLst>
-  <p:sldSz cx="9144000" cy="5143500"/>
+  <p:sldSz cx="9144000" cy="5143500" type="screen16x9"/>
   <p:notesSz cx="5143500" cy="9144000"/>
   <p:defaultTextStyle>
     <a:lvl1pPr marL="0" algn="l" defTabSz="914400" rtl="0" eaLnBrk="1" latinLnBrk="0" hangingPunct="1">
@@ -113,6 +113,11 @@
       </a:defRPr>
     </a:lvl9pPr>
   </p:defaultTextStyle>
+  <p:extLst>
+    <p:ext uri="{EFAFB233-063F-42B5-8137-9DF3F51BA10A}">
+      <p15:sldGuideLst xmlns:p15="http://schemas.microsoft.com/office/powerpoint/2012/main"/>
+    </p:ext>
+  </p:extLst>
 </p:presentation>
 </file>
 
@@ -138,234 +143,10 @@
           <a:chExt cx="0" cy="0"/>
         </a:xfrm>
       </p:grpSpPr>
-      <p:sp>
-        <p:nvSpPr>
-          <p:cNvPr id="2" name="Header Placeholder 1"/>
-          <p:cNvSpPr>
-            <a:spLocks noGrp="1"/>
-          </p:cNvSpPr>
-          <p:nvPr>
-            <p:ph type="hdr" sz="quarter"/>
-          </p:nvPr>
-        </p:nvSpPr>
-        <p:spPr>
-          <a:xfrm>
-            <a:off x="0" y="0"/>
-            <a:ext cx="2971800" cy="458788"/>
-          </a:xfrm>
-          <a:prstGeom prst="rect">
-            <a:avLst/>
-          </a:prstGeom>
-        </p:spPr>
-        <p:txBody>
-          <a:bodyPr vert="horz" lIns="91440" tIns="45720" rIns="91440" bIns="45720" rtlCol="0"/>
-          <a:lstStyle>
-            <a:lvl1pPr algn="l">
-              <a:defRPr sz="1200"/>
-            </a:lvl1pPr>
-          </a:lstStyle>
-          <a:p>
-            <a:endParaRPr lang="en-US"/>
-          </a:p>
-        </p:txBody>
-      </p:sp>
-      <p:sp>
-        <p:nvSpPr>
-          <p:cNvPr id="3" name="Date Placeholder 2"/>
-          <p:cNvSpPr>
-            <a:spLocks noGrp="1"/>
-          </p:cNvSpPr>
-          <p:nvPr>
-            <p:ph type="dt" idx="1"/>
-          </p:nvPr>
-        </p:nvSpPr>
-        <p:spPr>
-          <a:xfrm>
-            <a:off x="3884613" y="0"/>
-            <a:ext cx="2971800" cy="458788"/>
-          </a:xfrm>
-          <a:prstGeom prst="rect">
-            <a:avLst/>
-          </a:prstGeom>
-        </p:spPr>
-        <p:txBody>
-          <a:bodyPr vert="horz" lIns="91440" tIns="45720" rIns="91440" bIns="45720" rtlCol="0"/>
-          <a:lstStyle>
-            <a:lvl1pPr algn="r">
-              <a:defRPr sz="1200"/>
-            </a:lvl1pPr>
-          </a:lstStyle>
-          <a:p>
-            <a:fld id="{5282F153-3F37-0F45-9E97-73ACFA13230C}" type="datetimeFigureOut">
-              <a:rPr lang="en-US"/>
-              <a:t>7/23/19</a:t>
-            </a:fld>
-            <a:endParaRPr lang="en-US"/>
-          </a:p>
-        </p:txBody>
-      </p:sp>
-      <p:sp>
-        <p:nvSpPr>
-          <p:cNvPr id="4" name="Slide Image Placeholder 3"/>
-          <p:cNvSpPr>
-            <a:spLocks noGrp="1" noRot="1" noChangeAspect="1"/>
-          </p:cNvSpPr>
-          <p:nvPr>
-            <p:ph type="sldImg" idx="2"/>
-          </p:nvPr>
-        </p:nvSpPr>
-        <p:spPr>
-          <a:xfrm>
-            <a:off x="685800" y="1143000"/>
-            <a:ext cx="5486400" cy="3086100"/>
-          </a:xfrm>
-          <a:prstGeom prst="rect">
-            <a:avLst/>
-          </a:prstGeom>
-          <a:noFill/>
-          <a:ln w="12700">
-            <a:solidFill>
-              <a:prstClr val="black"/>
-            </a:solidFill>
-          </a:ln>
-        </p:spPr>
-        <p:txBody>
-          <a:bodyPr vert="horz" lIns="91440" tIns="45720" rIns="91440" bIns="45720" rtlCol="0" anchor="ctr"/>
-          <a:lstStyle/>
-          <a:p>
-            <a:endParaRPr lang="en-US"/>
-          </a:p>
-        </p:txBody>
-      </p:sp>
-      <p:sp>
-        <p:nvSpPr>
-          <p:cNvPr id="5" name="Notes Placeholder 4"/>
-          <p:cNvSpPr>
-            <a:spLocks noGrp="1"/>
-          </p:cNvSpPr>
-          <p:nvPr>
-            <p:ph type="body" sz="quarter" idx="3"/>
-          </p:nvPr>
-        </p:nvSpPr>
-        <p:spPr>
-          <a:xfrm>
-            <a:off x="685800" y="4400550"/>
-            <a:ext cx="5486400" cy="3600450"/>
-          </a:xfrm>
-          <a:prstGeom prst="rect">
-            <a:avLst/>
-          </a:prstGeom>
-        </p:spPr>
-        <p:txBody>
-          <a:bodyPr vert="horz" lIns="91440" tIns="45720" rIns="91440" bIns="45720" rtlCol="0"/>
-          <a:lstStyle/>
-          <a:p>
-            <a:pPr lvl="0"/>
-            <a:r>
-              <a:rPr lang="en-US"/>
-              <a:t>Click to edit Master text styles</a:t>
-            </a:r>
-          </a:p>
-          <a:p>
-            <a:pPr lvl="1"/>
-            <a:r>
-              <a:rPr lang="en-US"/>
-              <a:t>Second level</a:t>
-            </a:r>
-          </a:p>
-          <a:p>
-            <a:pPr lvl="2"/>
-            <a:r>
-              <a:rPr lang="en-US"/>
-              <a:t>Third level</a:t>
-            </a:r>
-          </a:p>
-          <a:p>
-            <a:pPr lvl="3"/>
-            <a:r>
-              <a:rPr lang="en-US"/>
-              <a:t>Fourth level</a:t>
-            </a:r>
-          </a:p>
-          <a:p>
-            <a:pPr lvl="4"/>
-            <a:r>
-              <a:rPr lang="en-US"/>
-              <a:t>Fifth level</a:t>
-            </a:r>
-          </a:p>
-        </p:txBody>
-      </p:sp>
-      <p:sp>
-        <p:nvSpPr>
-          <p:cNvPr id="6" name="Footer Placeholder 5"/>
-          <p:cNvSpPr>
-            <a:spLocks noGrp="1"/>
-          </p:cNvSpPr>
-          <p:nvPr>
-            <p:ph type="ftr" sz="quarter" idx="4"/>
-          </p:nvPr>
-        </p:nvSpPr>
-        <p:spPr>
-          <a:xfrm>
-            <a:off x="0" y="8685213"/>
-            <a:ext cx="2971800" cy="458787"/>
-          </a:xfrm>
-          <a:prstGeom prst="rect">
-            <a:avLst/>
-          </a:prstGeom>
-        </p:spPr>
-        <p:txBody>
-          <a:bodyPr vert="horz" lIns="91440" tIns="45720" rIns="91440" bIns="45720" rtlCol="0" anchor="b"/>
-          <a:lstStyle>
-            <a:lvl1pPr algn="l">
-              <a:defRPr sz="1200"/>
-            </a:lvl1pPr>
-          </a:lstStyle>
-          <a:p>
-            <a:endParaRPr lang="en-US"/>
-          </a:p>
-        </p:txBody>
-      </p:sp>
-      <p:sp>
-        <p:nvSpPr>
-          <p:cNvPr id="7" name="Slide Number Placeholder 6"/>
-          <p:cNvSpPr>
-            <a:spLocks noGrp="1"/>
-          </p:cNvSpPr>
-          <p:nvPr>
-            <p:ph type="sldNum" sz="quarter" idx="5"/>
-          </p:nvPr>
-        </p:nvSpPr>
-        <p:spPr>
-          <a:xfrm>
-            <a:off x="3884613" y="8685213"/>
-            <a:ext cx="2971800" cy="458787"/>
-          </a:xfrm>
-          <a:prstGeom prst="rect">
-            <a:avLst/>
-          </a:prstGeom>
-        </p:spPr>
-        <p:txBody>
-          <a:bodyPr vert="horz" lIns="91440" tIns="45720" rIns="91440" bIns="45720" rtlCol="0" anchor="b"/>
-          <a:lstStyle>
-            <a:lvl1pPr algn="r">
-              <a:defRPr sz="1200"/>
-            </a:lvl1pPr>
-          </a:lstStyle>
-          <a:p>
-            <a:fld id="{CE5E9CC1-C706-0F49-92D6-E571CC5EEA8F}" type="slidenum">
-              <a:rPr lang="en-US"/>
-              <a:t>‹#›</a:t>
-            </a:fld>
-            <a:endParaRPr lang="en-US"/>
-          </a:p>
-        </p:txBody>
-      </p:sp>
     </p:spTree>
     <p:extLst>
       <p:ext uri="{BB962C8B-B14F-4D97-AF65-F5344CB8AC3E}">
-        <p14:creationId xmlns:p14="http://schemas.microsoft.com/office/powerpoint/2010/main" val="1024086991"/>
+        <p14:creationId xmlns:p14="http://schemas.microsoft.com/office/powerpoint/2010/main" val="3312311912"/>
       </p:ext>
     </p:extLst>
   </p:cSld>
@@ -514,7 +295,6 @@
               <a:t>Intro:
 „In dieser Lektion bekommst du das EINE Mantra das alles trägt — 100 Prozent Selbstverantwortung. Und wir gehen tiefer als „nimm dich zusammen". Wir schauen uns die alte Identität an die dich sabotiert, und du wählst eine neue. Klingt gross, ist aber genau das was es braucht — Wochenplan-Apps nützen nichts wenn du innerlich weiterhin glaubst dass du keine CEO sein DARFST."</a:t>
             </a:r>
-            <a:endParaRPr lang="en-US" dirty="0"/>
           </a:p>
         </p:txBody>
       </p:sp>
@@ -603,7 +383,6 @@
               <a:t>Outro:
 „Bevor du zur 1.3 gehst — Arbeitsblatt öffnen. Drei Sachen: welche „Wenn nur..."-Falle ist deine, welcher Glaubenssatz aus den drei Bereichen sabotiert dich am stärksten, und welche NEUE Identität wählst du. Schreib die neue Identität als „Ich bin..."-Satz auf. Nicht „Ich werde", nicht „Ich will" — „Ich bin". Pin den Satz an deinen Bildschirm. In Lektion 1.3 schauen wir dann welche fünf Aufgaben überhaupt zu dieser neuen Identität gehören."</a:t>
             </a:r>
-            <a:endParaRPr lang="en-US" dirty="0"/>
           </a:p>
         </p:txBody>
       </p:sp>
@@ -692,7 +471,6 @@
               <a:t>Sprechnotiz:
 „Drei Sachen kommen. Erstens — die typischen „Wenn nur..."-Warte-Fallen, eine davon erkennst du wieder. Zweitens — und das ist neu — wir gucken welche Glaubenssätze dich sabotieren. In drei Bereichen die für uns Mamas extrem stark sind: Mama-Sein, Erfolg, und Vereinbarkeit. Drittens wählst du am Ende eine neue Identität. Konkret, in deinen Worten."</a:t>
             </a:r>
-            <a:endParaRPr lang="en-US" dirty="0"/>
           </a:p>
         </p:txBody>
       </p:sp>
@@ -781,7 +559,6 @@
               <a:t>Sprechnotiz:
 „Drei Warte-Fallen. Erstens „wenn nur Zeit" — wenn die Kinder grösser sind, die Ferien vorbei, die Phase ruhiger. Zweitens „wenn nur Geld" — wenn ich eine echte VA hätte, das Tool kaufen könnte, der Mann mehr verdient. Drittens „wenn nur Wissen" — wenn ich erst diesen Kurs fertig habe, wenn ich KI besser kann, wenn ich mir sicher bin. Erkennst du dich? Wahrscheinlich in mehreren. Aber bevor wir das Mantra anwenden, müssen wir verstehen WAS DARUNTER liegt."</a:t>
             </a:r>
-            <a:endParaRPr lang="en-US" dirty="0"/>
           </a:p>
         </p:txBody>
       </p:sp>
@@ -870,7 +647,6 @@
               <a:t>Sprechnotiz:
 „Niemand wird kommen und dich retten. Keine bessere Phase kommt, kein Geldsegen, kein perfekter Kurs. Das klingt brutal, ist aber das Freieste was du hören kannst — weil es dich aus dem Warten raus holt. Aber das Mantra allein reicht nicht. Hinter dem Warten liegt etwas Tieferes: eine Identität. Eine Identität die NICHT glaubt dass sie CEO sein darf. Da gehen wir jetzt rein."</a:t>
             </a:r>
-            <a:endParaRPr lang="en-US" dirty="0"/>
           </a:p>
         </p:txBody>
       </p:sp>
@@ -959,7 +735,6 @@
               <a:t>Sprechnotiz:
 „Bevor wir Verhalten ändern, müssen wir den Layer drunter anschauen. Das ist das Modell: Aus deinen Werten entstehen Glaubenssätze, aus den Glaubenssätzen entstehen Geschichten die du dir erzählst, daraus dein Verhalten. Wenn du zum Beispiel den Wert „Familie" hast und gleichzeitig glaubst „Erfolgreiche Mütter vernachlässigen ihre Kinder" — dann wirst du dich JEDES MAL selbst sabotieren wenn dein Business läuft. Egal wie gute Apps du hast. Drum schauen wir uns gleich die drei Bereiche an in denen Mamas die heftigsten Glaubenssätze haben."</a:t>
             </a:r>
-            <a:endParaRPr lang="en-US" dirty="0"/>
           </a:p>
         </p:txBody>
       </p:sp>
@@ -1048,7 +823,6 @@
               <a:t>Sprechnotiz:
 „Hier sind sie — die drei Bereiche in denen wir Mamas die heftigsten Glaubenssätze tragen. Mama-Sein: „Eine gute Mama ist immer da, Mama-Sein heisst Verzicht, wenn ich mich kümmere leide ich." Erfolg: „Erfolg ist für andere, wenn ich erfolgreich werde verändert sich was, ich darf nicht zu sichtbar sein." Vereinbarkeit: „Familie ODER Karriere, beides geht nicht, ich kann nichts richtig machen." Wenn auch nur EIN Glaubenssatz davon in dir aktiv ist, wirst du dich an deinem eigenen Erfolg vorbeischrauben. Im Arbeitsblatt schaust du gleich welcher bei dir am stärksten ist."</a:t>
             </a:r>
-            <a:endParaRPr lang="en-US" dirty="0"/>
           </a:p>
         </p:txBody>
       </p:sp>
@@ -1137,7 +911,6 @@
               <a:t>Sprechnotiz:
 „Vier konkrete Identitäts-Wechsel die ich bei meinen Mentees am häufigsten sehe. Alte Identität: „Ich bin die Macherin". Neue: „Ich bin die Entscheiderin". Alte: „Ich muss alles selbst können". Neue: „Ich darf führen, nicht selbst tun". Alte: „Ich darf erst wenn die Kids gross sind". Neue: „Ich darf jetzt. Die Kinder profitieren von einer Mama die ihr Ding macht." Alte: „Erfolg ist gefährlich, da verändert sich was". Neue: „Erfolg ist Vorbild für meine Kinder — vor allem für meine Töchter und Söhne." Welche Identität ist deine? Schreib das im Arbeitsblatt auf — nicht meine Wörter, deine."</a:t>
             </a:r>
-            <a:endParaRPr lang="en-US" dirty="0"/>
           </a:p>
         </p:txBody>
       </p:sp>
@@ -1226,7 +999,6 @@
               <a:t>Sprechnotiz:
 „Damit das nicht abstrakt bleibt — mein eigener Identitäts-Shift im Mai 2025. Mein alter Glaubenssatz war „Ich bin Mama von vier, Business ist nur möglich wenn es im Hintergrund läuft, leise, nebenher". Der Wendepunkt war eine ganz konkrete Frage die ich mir gestellt habe — darf ich eigentlich sichtbar sein? Antwort, die ich entschieden habe: ja. Identität neu — „Ich bin Mompreneurin. Auch um 9 Uhr am Vormittag, auch öffentlich, auch laut wenn nötig." Und das Verhalten folgte automatisch: Webinar geplant, Sales-Page gebaut, Kurs verkauft. Niemand hat mich gerettet — ich habe mich neu definiert. Und das ist der wichtigste Satz in dieser Lektion: Identität entscheidet wer du sein darfst. Verhalten folgt — nie andersherum."</a:t>
             </a:r>
-            <a:endParaRPr lang="en-US" dirty="0"/>
           </a:p>
         </p:txBody>
       </p:sp>
@@ -1315,7 +1087,6 @@
               <a:t>Sprechnotiz:
 „Vier Takeaways. Niemand wird kommen, das ist befreiend. Warte-Fallen sind ein Symptom — die Wurzel ist die Identität. Bei uns Mamas in drei Bereichen besonders heftig: Mama-Sein, Erfolg, Vereinbarkeit. Und der wichtigste Mind-Shift: erst neue Identität wählen, dann folgt Verhalten automatisch. Nicht andersherum."</a:t>
             </a:r>
-            <a:endParaRPr lang="en-US" dirty="0"/>
           </a:p>
         </p:txBody>
       </p:sp>
@@ -1388,6 +1159,11 @@
 <file path=ppt/slideMasters/slideMaster1.xml><?xml version="1.0" encoding="utf-8"?>
 <p:sldMaster xmlns:a="http://schemas.openxmlformats.org/drawingml/2006/main" xmlns:r="http://schemas.openxmlformats.org/officeDocument/2006/relationships" xmlns:p="http://schemas.openxmlformats.org/presentationml/2006/main">
   <p:cSld>
+    <p:bg>
+      <p:bgRef idx="1001">
+        <a:schemeClr val="bg1"/>
+      </p:bgRef>
+    </p:bg>
     <p:spTree>
       <p:nvGrpSpPr>
         <p:cNvPr id="1" name=""/>
@@ -1670,6 +1446,7 @@
         <a:solidFill>
           <a:srgbClr val="F1ECDD"/>
         </a:solidFill>
+        <a:effectLst/>
       </p:bgPr>
     </p:bg>
     <p:spTree>
@@ -1714,6 +1491,13 @@
             <a:prstDash val="solid"/>
           </a:ln>
         </p:spPr>
+        <p:txBody>
+          <a:bodyPr/>
+          <a:lstStyle/>
+          <a:p>
+            <a:endParaRPr lang="de-CH"/>
+          </a:p>
+        </p:txBody>
       </p:sp>
       <p:sp>
         <p:nvSpPr>
@@ -1736,11 +1520,11 @@
           <a:bodyPr wrap="square" rtlCol="0" anchor="ctr"/>
           <a:lstStyle/>
           <a:p>
-            <a:pPr indent="0" marL="0">
-              <a:buNone/>
-            </a:pPr>
-            <a:r>
-              <a:rPr lang="en-US" sz="1100" b="1" spc="400" kern="0" dirty="0">
+            <a:pPr marL="0" indent="0">
+              <a:buNone/>
+            </a:pPr>
+            <a:r>
+              <a:rPr lang="en-US" sz="1100" b="1" kern="0" spc="400" dirty="0">
                 <a:solidFill>
                   <a:srgbClr val="DC822E"/>
                 </a:solidFill>
@@ -1780,6 +1564,13 @@
             <a:prstDash val="solid"/>
           </a:ln>
         </p:spPr>
+        <p:txBody>
+          <a:bodyPr/>
+          <a:lstStyle/>
+          <a:p>
+            <a:endParaRPr lang="de-CH"/>
+          </a:p>
+        </p:txBody>
       </p:sp>
       <p:sp>
         <p:nvSpPr>
@@ -1802,7 +1593,7 @@
           <a:bodyPr wrap="square" lIns="0" tIns="0" rIns="0" bIns="0" rtlCol="0" anchor="t"/>
           <a:lstStyle/>
           <a:p>
-            <a:pPr indent="0" marL="0">
+            <a:pPr marL="0" indent="0">
               <a:buNone/>
             </a:pPr>
             <a:r>
@@ -1841,7 +1632,7 @@
           <a:bodyPr wrap="square" lIns="0" tIns="0" rIns="0" bIns="0" rtlCol="0" anchor="t"/>
           <a:lstStyle/>
           <a:p>
-            <a:pPr indent="0" marL="0">
+            <a:pPr marL="0" indent="0">
               <a:buNone/>
             </a:pPr>
             <a:r>
@@ -1858,7 +1649,7 @@
             <a:endParaRPr lang="en-US" sz="1800" dirty="0"/>
           </a:p>
           <a:p>
-            <a:pPr indent="0" marL="0">
+            <a:pPr marL="0" indent="0">
               <a:buNone/>
             </a:pPr>
             <a:r>
@@ -1875,7 +1666,7 @@
             <a:endParaRPr lang="en-US" sz="1800" dirty="0"/>
           </a:p>
           <a:p>
-            <a:pPr indent="0" marL="0">
+            <a:pPr marL="0" indent="0">
               <a:buNone/>
             </a:pPr>
             <a:r>
@@ -1914,7 +1705,7 @@
           <a:bodyPr wrap="square" rtlCol="0" anchor="ctr"/>
           <a:lstStyle/>
           <a:p>
-            <a:pPr indent="0" marL="0">
+            <a:pPr marL="0" indent="0">
               <a:buNone/>
             </a:pPr>
             <a:r>
@@ -1953,7 +1744,7 @@
           <a:bodyPr wrap="square" rtlCol="0" anchor="ctr"/>
           <a:lstStyle/>
           <a:p>
-            <a:pPr algn="r" indent="0" marL="0">
+            <a:pPr marL="0" indent="0" algn="r">
               <a:buNone/>
             </a:pPr>
             <a:r>
@@ -1987,6 +1778,7 @@
         <a:solidFill>
           <a:srgbClr val="FFFFFF"/>
         </a:solidFill>
+        <a:effectLst/>
       </p:bgPr>
     </p:bg>
     <p:spTree>
@@ -2024,7 +1816,7 @@
           <a:bodyPr wrap="square" lIns="0" tIns="0" rIns="0" bIns="0" rtlCol="0" anchor="t"/>
           <a:lstStyle/>
           <a:p>
-            <a:pPr indent="0" marL="0">
+            <a:pPr marL="0" indent="0">
               <a:buNone/>
             </a:pPr>
             <a:r>
@@ -2068,6 +1860,13 @@
             <a:prstDash val="solid"/>
           </a:ln>
         </p:spPr>
+        <p:txBody>
+          <a:bodyPr/>
+          <a:lstStyle/>
+          <a:p>
+            <a:endParaRPr lang="de-CH"/>
+          </a:p>
+        </p:txBody>
       </p:sp>
       <p:sp>
         <p:nvSpPr>
@@ -2095,6 +1894,13 @@
             <a:prstDash val="solid"/>
           </a:ln>
         </p:spPr>
+        <p:txBody>
+          <a:bodyPr/>
+          <a:lstStyle/>
+          <a:p>
+            <a:endParaRPr lang="de-CH"/>
+          </a:p>
+        </p:txBody>
       </p:sp>
       <p:sp>
         <p:nvSpPr>
@@ -2117,11 +1923,11 @@
           <a:bodyPr wrap="square" rtlCol="0" anchor="ctr"/>
           <a:lstStyle/>
           <a:p>
-            <a:pPr indent="0" marL="0">
-              <a:buNone/>
-            </a:pPr>
-            <a:r>
-              <a:rPr lang="en-US" sz="1000" b="1" spc="300" kern="0" dirty="0">
+            <a:pPr marL="0" indent="0">
+              <a:buNone/>
+            </a:pPr>
+            <a:r>
+              <a:rPr lang="en-US" sz="1000" b="1" kern="0" spc="300" dirty="0">
                 <a:solidFill>
                   <a:srgbClr val="0D6168"/>
                 </a:solidFill>
@@ -2156,7 +1962,7 @@
           <a:bodyPr wrap="square" lIns="0" tIns="0" rIns="0" bIns="0" rtlCol="0" anchor="t"/>
           <a:lstStyle/>
           <a:p>
-            <a:pPr indent="0" marL="0">
+            <a:pPr marL="0" indent="0">
               <a:buNone/>
             </a:pPr>
             <a:r>
@@ -2285,6 +2091,13 @@
             <a:prstDash val="solid"/>
           </a:ln>
         </p:spPr>
+        <p:txBody>
+          <a:bodyPr/>
+          <a:lstStyle/>
+          <a:p>
+            <a:endParaRPr lang="de-CH"/>
+          </a:p>
+        </p:txBody>
       </p:sp>
       <p:sp>
         <p:nvSpPr>
@@ -2312,6 +2125,13 @@
             <a:prstDash val="solid"/>
           </a:ln>
         </p:spPr>
+        <p:txBody>
+          <a:bodyPr/>
+          <a:lstStyle/>
+          <a:p>
+            <a:endParaRPr lang="de-CH"/>
+          </a:p>
+        </p:txBody>
       </p:sp>
       <p:sp>
         <p:nvSpPr>
@@ -2334,11 +2154,11 @@
           <a:bodyPr wrap="square" rtlCol="0" anchor="ctr"/>
           <a:lstStyle/>
           <a:p>
-            <a:pPr indent="0" marL="0">
-              <a:buNone/>
-            </a:pPr>
-            <a:r>
-              <a:rPr lang="en-US" sz="1000" b="1" spc="300" kern="0" dirty="0">
+            <a:pPr marL="0" indent="0">
+              <a:buNone/>
+            </a:pPr>
+            <a:r>
+              <a:rPr lang="en-US" sz="1000" b="1" kern="0" spc="300" dirty="0">
                 <a:solidFill>
                   <a:srgbClr val="DC822E"/>
                 </a:solidFill>
@@ -2373,7 +2193,7 @@
           <a:bodyPr wrap="square" lIns="0" tIns="0" rIns="0" bIns="0" rtlCol="0" anchor="t"/>
           <a:lstStyle/>
           <a:p>
-            <a:pPr indent="0" marL="0">
+            <a:pPr marL="0" indent="0">
               <a:buNone/>
             </a:pPr>
             <a:r>
@@ -2497,11 +2317,11 @@
           <a:bodyPr wrap="square" rtlCol="0" anchor="ctr"/>
           <a:lstStyle/>
           <a:p>
-            <a:pPr indent="0" marL="0">
-              <a:buNone/>
-            </a:pPr>
-            <a:r>
-              <a:rPr lang="en-US" sz="900" spc="200" kern="0" dirty="0">
+            <a:pPr marL="0" indent="0">
+              <a:buNone/>
+            </a:pPr>
+            <a:r>
+              <a:rPr lang="en-US" sz="900" kern="0" spc="200" dirty="0">
                 <a:solidFill>
                   <a:srgbClr val="7A8A95"/>
                 </a:solidFill>
@@ -2536,7 +2356,7 @@
           <a:bodyPr wrap="square" rtlCol="0" anchor="ctr"/>
           <a:lstStyle/>
           <a:p>
-            <a:pPr algn="r" indent="0" marL="0">
+            <a:pPr marL="0" indent="0" algn="r">
               <a:buNone/>
             </a:pPr>
             <a:r>
@@ -2570,6 +2390,7 @@
         <a:solidFill>
           <a:srgbClr val="FFFFFF"/>
         </a:solidFill>
+        <a:effectLst/>
       </p:bgPr>
     </p:bg>
     <p:spTree>
@@ -2607,11 +2428,11 @@
           <a:bodyPr wrap="square" rtlCol="0" anchor="ctr"/>
           <a:lstStyle/>
           <a:p>
-            <a:pPr indent="0" marL="0">
-              <a:buNone/>
-            </a:pPr>
-            <a:r>
-              <a:rPr lang="en-US" sz="1000" b="1" spc="400" kern="0" dirty="0">
+            <a:pPr marL="0" indent="0">
+              <a:buNone/>
+            </a:pPr>
+            <a:r>
+              <a:rPr lang="en-US" sz="1000" b="1" kern="0" spc="400" dirty="0">
                 <a:solidFill>
                   <a:srgbClr val="DC822E"/>
                 </a:solidFill>
@@ -2646,7 +2467,7 @@
           <a:bodyPr wrap="square" lIns="0" tIns="0" rIns="0" bIns="0" rtlCol="0" anchor="t"/>
           <a:lstStyle/>
           <a:p>
-            <a:pPr indent="0" marL="0">
+            <a:pPr marL="0" indent="0">
               <a:buNone/>
             </a:pPr>
             <a:r>
@@ -2690,6 +2511,13 @@
             <a:prstDash val="solid"/>
           </a:ln>
         </p:spPr>
+        <p:txBody>
+          <a:bodyPr/>
+          <a:lstStyle/>
+          <a:p>
+            <a:endParaRPr lang="de-CH"/>
+          </a:p>
+        </p:txBody>
       </p:sp>
       <p:sp>
         <p:nvSpPr>
@@ -2717,6 +2545,13 @@
             <a:prstDash val="solid"/>
           </a:ln>
         </p:spPr>
+        <p:txBody>
+          <a:bodyPr/>
+          <a:lstStyle/>
+          <a:p>
+            <a:endParaRPr lang="de-CH"/>
+          </a:p>
+        </p:txBody>
       </p:sp>
       <p:sp>
         <p:nvSpPr>
@@ -2739,7 +2574,7 @@
           <a:bodyPr wrap="square" lIns="0" tIns="0" rIns="0" bIns="0" rtlCol="0" anchor="ctr"/>
           <a:lstStyle/>
           <a:p>
-            <a:pPr algn="ctr" indent="0" marL="0">
+            <a:pPr marL="0" indent="0" algn="ctr">
               <a:buNone/>
             </a:pPr>
             <a:r>
@@ -2778,7 +2613,7 @@
           <a:bodyPr wrap="square" lIns="0" tIns="0" rIns="0" bIns="0" rtlCol="0" anchor="ctr"/>
           <a:lstStyle/>
           <a:p>
-            <a:pPr indent="0" marL="0">
+            <a:pPr marL="0" indent="0">
               <a:buNone/>
             </a:pPr>
             <a:r>
@@ -2822,6 +2657,13 @@
             <a:prstDash val="solid"/>
           </a:ln>
         </p:spPr>
+        <p:txBody>
+          <a:bodyPr/>
+          <a:lstStyle/>
+          <a:p>
+            <a:endParaRPr lang="de-CH"/>
+          </a:p>
+        </p:txBody>
       </p:sp>
       <p:sp>
         <p:nvSpPr>
@@ -2844,7 +2686,7 @@
           <a:bodyPr wrap="square" lIns="0" tIns="0" rIns="0" bIns="0" rtlCol="0" anchor="ctr"/>
           <a:lstStyle/>
           <a:p>
-            <a:pPr algn="ctr" indent="0" marL="0">
+            <a:pPr marL="0" indent="0" algn="ctr">
               <a:buNone/>
             </a:pPr>
             <a:r>
@@ -2883,7 +2725,7 @@
           <a:bodyPr wrap="square" lIns="0" tIns="0" rIns="0" bIns="0" rtlCol="0" anchor="ctr"/>
           <a:lstStyle/>
           <a:p>
-            <a:pPr indent="0" marL="0">
+            <a:pPr marL="0" indent="0">
               <a:buNone/>
             </a:pPr>
             <a:r>
@@ -2927,6 +2769,13 @@
             <a:prstDash val="solid"/>
           </a:ln>
         </p:spPr>
+        <p:txBody>
+          <a:bodyPr/>
+          <a:lstStyle/>
+          <a:p>
+            <a:endParaRPr lang="de-CH"/>
+          </a:p>
+        </p:txBody>
       </p:sp>
       <p:sp>
         <p:nvSpPr>
@@ -2949,7 +2798,7 @@
           <a:bodyPr wrap="square" lIns="0" tIns="0" rIns="0" bIns="0" rtlCol="0" anchor="ctr"/>
           <a:lstStyle/>
           <a:p>
-            <a:pPr algn="ctr" indent="0" marL="0">
+            <a:pPr marL="0" indent="0" algn="ctr">
               <a:buNone/>
             </a:pPr>
             <a:r>
@@ -2988,7 +2837,7 @@
           <a:bodyPr wrap="square" lIns="0" tIns="0" rIns="0" bIns="0" rtlCol="0" anchor="ctr"/>
           <a:lstStyle/>
           <a:p>
-            <a:pPr indent="0" marL="0">
+            <a:pPr marL="0" indent="0">
               <a:buNone/>
             </a:pPr>
             <a:r>
@@ -3027,11 +2876,11 @@
           <a:bodyPr wrap="square" rtlCol="0" anchor="ctr"/>
           <a:lstStyle/>
           <a:p>
-            <a:pPr indent="0" marL="0">
-              <a:buNone/>
-            </a:pPr>
-            <a:r>
-              <a:rPr lang="en-US" sz="900" spc="200" kern="0" dirty="0">
+            <a:pPr marL="0" indent="0">
+              <a:buNone/>
+            </a:pPr>
+            <a:r>
+              <a:rPr lang="en-US" sz="900" kern="0" spc="200" dirty="0">
                 <a:solidFill>
                   <a:srgbClr val="7A8A95"/>
                 </a:solidFill>
@@ -3066,7 +2915,7 @@
           <a:bodyPr wrap="square" rtlCol="0" anchor="ctr"/>
           <a:lstStyle/>
           <a:p>
-            <a:pPr algn="r" indent="0" marL="0">
+            <a:pPr marL="0" indent="0" algn="r">
               <a:buNone/>
             </a:pPr>
             <a:r>
@@ -3100,6 +2949,7 @@
         <a:solidFill>
           <a:srgbClr val="FFFFFF"/>
         </a:solidFill>
+        <a:effectLst/>
       </p:bgPr>
     </p:bg>
     <p:spTree>
@@ -3137,7 +2987,7 @@
           <a:bodyPr wrap="square" lIns="0" tIns="0" rIns="0" bIns="0" rtlCol="0" anchor="t"/>
           <a:lstStyle/>
           <a:p>
-            <a:pPr indent="0" marL="0">
+            <a:pPr marL="0" indent="0">
               <a:buNone/>
             </a:pPr>
             <a:r>
@@ -3181,6 +3031,13 @@
             <a:prstDash val="solid"/>
           </a:ln>
         </p:spPr>
+        <p:txBody>
+          <a:bodyPr/>
+          <a:lstStyle/>
+          <a:p>
+            <a:endParaRPr lang="de-CH"/>
+          </a:p>
+        </p:txBody>
       </p:sp>
       <p:sp>
         <p:nvSpPr>
@@ -3208,6 +3065,13 @@
             <a:prstDash val="solid"/>
           </a:ln>
         </p:spPr>
+        <p:txBody>
+          <a:bodyPr/>
+          <a:lstStyle/>
+          <a:p>
+            <a:endParaRPr lang="de-CH"/>
+          </a:p>
+        </p:txBody>
       </p:sp>
       <p:sp>
         <p:nvSpPr>
@@ -3230,7 +3094,7 @@
           <a:bodyPr wrap="square" lIns="0" tIns="0" rIns="0" bIns="0" rtlCol="0" anchor="t"/>
           <a:lstStyle/>
           <a:p>
-            <a:pPr indent="0" marL="0">
+            <a:pPr marL="0" indent="0">
               <a:buNone/>
             </a:pPr>
             <a:r>
@@ -3269,7 +3133,7 @@
           <a:bodyPr wrap="square" lIns="0" tIns="0" rIns="0" bIns="0" rtlCol="0" anchor="t"/>
           <a:lstStyle/>
           <a:p>
-            <a:pPr indent="0" marL="0">
+            <a:pPr marL="0" indent="0">
               <a:buNone/>
             </a:pPr>
             <a:r>
@@ -3286,7 +3150,7 @@
             <a:endParaRPr lang="en-US" sz="1500" dirty="0"/>
           </a:p>
           <a:p>
-            <a:pPr indent="0" marL="0">
+            <a:pPr marL="0" indent="0">
               <a:buNone/>
             </a:pPr>
             <a:r>
@@ -3303,7 +3167,7 @@
             <a:endParaRPr lang="en-US" sz="1500" dirty="0"/>
           </a:p>
           <a:p>
-            <a:pPr indent="0" marL="0">
+            <a:pPr marL="0" indent="0">
               <a:buNone/>
             </a:pPr>
             <a:r>
@@ -3347,6 +3211,13 @@
             <a:prstDash val="solid"/>
           </a:ln>
         </p:spPr>
+        <p:txBody>
+          <a:bodyPr/>
+          <a:lstStyle/>
+          <a:p>
+            <a:endParaRPr lang="de-CH"/>
+          </a:p>
+        </p:txBody>
       </p:sp>
       <p:sp>
         <p:nvSpPr>
@@ -3374,6 +3245,13 @@
             <a:prstDash val="solid"/>
           </a:ln>
         </p:spPr>
+        <p:txBody>
+          <a:bodyPr/>
+          <a:lstStyle/>
+          <a:p>
+            <a:endParaRPr lang="de-CH"/>
+          </a:p>
+        </p:txBody>
       </p:sp>
       <p:sp>
         <p:nvSpPr>
@@ -3396,7 +3274,7 @@
           <a:bodyPr wrap="square" lIns="0" tIns="0" rIns="0" bIns="0" rtlCol="0" anchor="t"/>
           <a:lstStyle/>
           <a:p>
-            <a:pPr indent="0" marL="0">
+            <a:pPr marL="0" indent="0">
               <a:buNone/>
             </a:pPr>
             <a:r>
@@ -3435,7 +3313,7 @@
           <a:bodyPr wrap="square" lIns="0" tIns="0" rIns="0" bIns="0" rtlCol="0" anchor="t"/>
           <a:lstStyle/>
           <a:p>
-            <a:pPr indent="0" marL="0">
+            <a:pPr marL="0" indent="0">
               <a:buNone/>
             </a:pPr>
             <a:r>
@@ -3452,7 +3330,7 @@
             <a:endParaRPr lang="en-US" sz="1500" dirty="0"/>
           </a:p>
           <a:p>
-            <a:pPr indent="0" marL="0">
+            <a:pPr marL="0" indent="0">
               <a:buNone/>
             </a:pPr>
             <a:r>
@@ -3469,7 +3347,7 @@
             <a:endParaRPr lang="en-US" sz="1500" dirty="0"/>
           </a:p>
           <a:p>
-            <a:pPr indent="0" marL="0">
+            <a:pPr marL="0" indent="0">
               <a:buNone/>
             </a:pPr>
             <a:r>
@@ -3513,6 +3391,13 @@
             <a:prstDash val="solid"/>
           </a:ln>
         </p:spPr>
+        <p:txBody>
+          <a:bodyPr/>
+          <a:lstStyle/>
+          <a:p>
+            <a:endParaRPr lang="de-CH"/>
+          </a:p>
+        </p:txBody>
       </p:sp>
       <p:sp>
         <p:nvSpPr>
@@ -3540,6 +3425,13 @@
             <a:prstDash val="solid"/>
           </a:ln>
         </p:spPr>
+        <p:txBody>
+          <a:bodyPr/>
+          <a:lstStyle/>
+          <a:p>
+            <a:endParaRPr lang="de-CH"/>
+          </a:p>
+        </p:txBody>
       </p:sp>
       <p:sp>
         <p:nvSpPr>
@@ -3562,7 +3454,7 @@
           <a:bodyPr wrap="square" lIns="0" tIns="0" rIns="0" bIns="0" rtlCol="0" anchor="t"/>
           <a:lstStyle/>
           <a:p>
-            <a:pPr indent="0" marL="0">
+            <a:pPr marL="0" indent="0">
               <a:buNone/>
             </a:pPr>
             <a:r>
@@ -3601,7 +3493,7 @@
           <a:bodyPr wrap="square" lIns="0" tIns="0" rIns="0" bIns="0" rtlCol="0" anchor="t"/>
           <a:lstStyle/>
           <a:p>
-            <a:pPr indent="0" marL="0">
+            <a:pPr marL="0" indent="0">
               <a:buNone/>
             </a:pPr>
             <a:r>
@@ -3618,7 +3510,7 @@
             <a:endParaRPr lang="en-US" sz="1500" dirty="0"/>
           </a:p>
           <a:p>
-            <a:pPr indent="0" marL="0">
+            <a:pPr marL="0" indent="0">
               <a:buNone/>
             </a:pPr>
             <a:r>
@@ -3635,7 +3527,7 @@
             <a:endParaRPr lang="en-US" sz="1500" dirty="0"/>
           </a:p>
           <a:p>
-            <a:pPr indent="0" marL="0">
+            <a:pPr marL="0" indent="0">
               <a:buNone/>
             </a:pPr>
             <a:r>
@@ -3674,11 +3566,11 @@
           <a:bodyPr wrap="square" rtlCol="0" anchor="ctr"/>
           <a:lstStyle/>
           <a:p>
-            <a:pPr indent="0" marL="0">
-              <a:buNone/>
-            </a:pPr>
-            <a:r>
-              <a:rPr lang="en-US" sz="900" spc="200" kern="0" dirty="0">
+            <a:pPr marL="0" indent="0">
+              <a:buNone/>
+            </a:pPr>
+            <a:r>
+              <a:rPr lang="en-US" sz="900" kern="0" spc="200" dirty="0">
                 <a:solidFill>
                   <a:srgbClr val="7A8A95"/>
                 </a:solidFill>
@@ -3713,7 +3605,7 @@
           <a:bodyPr wrap="square" rtlCol="0" anchor="ctr"/>
           <a:lstStyle/>
           <a:p>
-            <a:pPr algn="r" indent="0" marL="0">
+            <a:pPr marL="0" indent="0" algn="r">
               <a:buNone/>
             </a:pPr>
             <a:r>
@@ -3747,6 +3639,7 @@
         <a:solidFill>
           <a:srgbClr val="12828C"/>
         </a:solidFill>
+        <a:effectLst/>
       </p:bgPr>
     </p:bg>
     <p:spTree>
@@ -3784,11 +3677,11 @@
           <a:bodyPr wrap="square" rtlCol="0" anchor="ctr"/>
           <a:lstStyle/>
           <a:p>
-            <a:pPr algn="ctr" indent="0" marL="0">
-              <a:buNone/>
-            </a:pPr>
-            <a:r>
-              <a:rPr lang="en-US" sz="1100" b="1" spc="400" kern="0" dirty="0">
+            <a:pPr marL="0" indent="0" algn="ctr">
+              <a:buNone/>
+            </a:pPr>
+            <a:r>
+              <a:rPr lang="en-US" sz="1100" b="1" kern="0" spc="400" dirty="0">
                 <a:solidFill>
                   <a:srgbClr val="DC822E"/>
                 </a:solidFill>
@@ -3828,6 +3721,13 @@
             <a:prstDash val="solid"/>
           </a:ln>
         </p:spPr>
+        <p:txBody>
+          <a:bodyPr/>
+          <a:lstStyle/>
+          <a:p>
+            <a:endParaRPr lang="de-CH"/>
+          </a:p>
+        </p:txBody>
       </p:sp>
       <p:sp>
         <p:nvSpPr>
@@ -3850,7 +3750,7 @@
           <a:bodyPr wrap="square" lIns="0" tIns="0" rIns="0" bIns="0" rtlCol="0" anchor="ctr"/>
           <a:lstStyle/>
           <a:p>
-            <a:pPr algn="ctr" indent="0" marL="0">
+            <a:pPr marL="0" indent="0" algn="ctr">
               <a:buNone/>
             </a:pPr>
             <a:r>
@@ -3867,7 +3767,7 @@
             <a:endParaRPr lang="en-US" sz="3600" dirty="0"/>
           </a:p>
           <a:p>
-            <a:pPr algn="ctr" indent="0" marL="0">
+            <a:pPr marL="0" indent="0" algn="ctr">
               <a:buNone/>
             </a:pPr>
             <a:r>
@@ -3884,7 +3784,7 @@
             <a:endParaRPr lang="en-US" sz="3600" dirty="0"/>
           </a:p>
           <a:p>
-            <a:pPr algn="ctr" indent="0" marL="0">
+            <a:pPr marL="0" indent="0" algn="ctr">
               <a:buNone/>
             </a:pPr>
             <a:r>
@@ -3923,11 +3823,11 @@
           <a:bodyPr wrap="square" rtlCol="0" anchor="ctr"/>
           <a:lstStyle/>
           <a:p>
-            <a:pPr indent="0" marL="0">
-              <a:buNone/>
-            </a:pPr>
-            <a:r>
-              <a:rPr lang="en-US" sz="900" spc="200" kern="0" dirty="0">
+            <a:pPr marL="0" indent="0">
+              <a:buNone/>
+            </a:pPr>
+            <a:r>
+              <a:rPr lang="en-US" sz="900" kern="0" spc="200" dirty="0">
                 <a:solidFill>
                   <a:srgbClr val="F1ECDD"/>
                 </a:solidFill>
@@ -3962,7 +3862,7 @@
           <a:bodyPr wrap="square" rtlCol="0" anchor="ctr"/>
           <a:lstStyle/>
           <a:p>
-            <a:pPr algn="r" indent="0" marL="0">
+            <a:pPr marL="0" indent="0" algn="r">
               <a:buNone/>
             </a:pPr>
             <a:r>
@@ -3996,6 +3896,7 @@
         <a:solidFill>
           <a:srgbClr val="FFFFFF"/>
         </a:solidFill>
+        <a:effectLst/>
       </p:bgPr>
     </p:bg>
     <p:spTree>
@@ -4033,7 +3934,7 @@
           <a:bodyPr wrap="square" lIns="0" tIns="0" rIns="0" bIns="0" rtlCol="0" anchor="t"/>
           <a:lstStyle/>
           <a:p>
-            <a:pPr indent="0" marL="0">
+            <a:pPr marL="0" indent="0">
               <a:buNone/>
             </a:pPr>
             <a:r>
@@ -4077,6 +3978,13 @@
             <a:prstDash val="solid"/>
           </a:ln>
         </p:spPr>
+        <p:txBody>
+          <a:bodyPr/>
+          <a:lstStyle/>
+          <a:p>
+            <a:endParaRPr lang="de-CH"/>
+          </a:p>
+        </p:txBody>
       </p:sp>
       <p:sp>
         <p:nvSpPr>
@@ -4099,7 +4007,7 @@
           <a:bodyPr wrap="square" lIns="0" tIns="0" rIns="0" bIns="0" rtlCol="0" anchor="ctr"/>
           <a:lstStyle/>
           <a:p>
-            <a:pPr algn="ctr" indent="0" marL="0">
+            <a:pPr marL="0" indent="0" algn="ctr">
               <a:buNone/>
             </a:pPr>
             <a:r>
@@ -4143,6 +4051,13 @@
             <a:prstDash val="solid"/>
           </a:ln>
         </p:spPr>
+        <p:txBody>
+          <a:bodyPr/>
+          <a:lstStyle/>
+          <a:p>
+            <a:endParaRPr lang="de-CH"/>
+          </a:p>
+        </p:txBody>
       </p:sp>
       <p:sp>
         <p:nvSpPr>
@@ -4165,7 +4080,7 @@
           <a:bodyPr wrap="square" lIns="0" tIns="0" rIns="0" bIns="0" rtlCol="0" anchor="t"/>
           <a:lstStyle/>
           <a:p>
-            <a:pPr indent="0" marL="0">
+            <a:pPr marL="0" indent="0">
               <a:buNone/>
             </a:pPr>
             <a:r>
@@ -4204,7 +4119,7 @@
           <a:bodyPr wrap="square" lIns="0" tIns="0" rIns="0" bIns="0" rtlCol="0" anchor="t"/>
           <a:lstStyle/>
           <a:p>
-            <a:pPr indent="0" marL="0">
+            <a:pPr marL="0" indent="0">
               <a:buNone/>
             </a:pPr>
             <a:r>
@@ -4221,7 +4136,7 @@
             <a:endParaRPr lang="en-US" sz="1400" dirty="0"/>
           </a:p>
           <a:p>
-            <a:pPr indent="0" marL="0">
+            <a:pPr marL="0" indent="0">
               <a:buNone/>
             </a:pPr>
             <a:r>
@@ -4265,6 +4180,13 @@
             <a:prstDash val="solid"/>
           </a:ln>
         </p:spPr>
+        <p:txBody>
+          <a:bodyPr/>
+          <a:lstStyle/>
+          <a:p>
+            <a:endParaRPr lang="de-CH"/>
+          </a:p>
+        </p:txBody>
       </p:sp>
       <p:sp>
         <p:nvSpPr>
@@ -4287,7 +4209,7 @@
           <a:bodyPr wrap="square" lIns="0" tIns="0" rIns="0" bIns="0" rtlCol="0" anchor="ctr"/>
           <a:lstStyle/>
           <a:p>
-            <a:pPr algn="ctr" indent="0" marL="0">
+            <a:pPr marL="0" indent="0" algn="ctr">
               <a:buNone/>
             </a:pPr>
             <a:r>
@@ -4331,6 +4253,13 @@
             <a:prstDash val="solid"/>
           </a:ln>
         </p:spPr>
+        <p:txBody>
+          <a:bodyPr/>
+          <a:lstStyle/>
+          <a:p>
+            <a:endParaRPr lang="de-CH"/>
+          </a:p>
+        </p:txBody>
       </p:sp>
       <p:sp>
         <p:nvSpPr>
@@ -4353,7 +4282,7 @@
           <a:bodyPr wrap="square" lIns="0" tIns="0" rIns="0" bIns="0" rtlCol="0" anchor="t"/>
           <a:lstStyle/>
           <a:p>
-            <a:pPr indent="0" marL="0">
+            <a:pPr marL="0" indent="0">
               <a:buNone/>
             </a:pPr>
             <a:r>
@@ -4392,7 +4321,7 @@
           <a:bodyPr wrap="square" lIns="0" tIns="0" rIns="0" bIns="0" rtlCol="0" anchor="t"/>
           <a:lstStyle/>
           <a:p>
-            <a:pPr indent="0" marL="0">
+            <a:pPr marL="0" indent="0">
               <a:buNone/>
             </a:pPr>
             <a:r>
@@ -4409,7 +4338,7 @@
             <a:endParaRPr lang="en-US" sz="1400" dirty="0"/>
           </a:p>
           <a:p>
-            <a:pPr indent="0" marL="0">
+            <a:pPr marL="0" indent="0">
               <a:buNone/>
             </a:pPr>
             <a:r>
@@ -4426,7 +4355,7 @@
             <a:endParaRPr lang="en-US" sz="1400" dirty="0"/>
           </a:p>
           <a:p>
-            <a:pPr indent="0" marL="0">
+            <a:pPr marL="0" indent="0">
               <a:buNone/>
             </a:pPr>
             <a:r>
@@ -4470,6 +4399,13 @@
             <a:prstDash val="solid"/>
           </a:ln>
         </p:spPr>
+        <p:txBody>
+          <a:bodyPr/>
+          <a:lstStyle/>
+          <a:p>
+            <a:endParaRPr lang="de-CH"/>
+          </a:p>
+        </p:txBody>
       </p:sp>
       <p:sp>
         <p:nvSpPr>
@@ -4492,7 +4428,7 @@
           <a:bodyPr wrap="square" lIns="0" tIns="0" rIns="0" bIns="0" rtlCol="0" anchor="ctr"/>
           <a:lstStyle/>
           <a:p>
-            <a:pPr algn="ctr" indent="0" marL="0">
+            <a:pPr marL="0" indent="0" algn="ctr">
               <a:buNone/>
             </a:pPr>
             <a:r>
@@ -4536,6 +4472,13 @@
             <a:prstDash val="solid"/>
           </a:ln>
         </p:spPr>
+        <p:txBody>
+          <a:bodyPr/>
+          <a:lstStyle/>
+          <a:p>
+            <a:endParaRPr lang="de-CH"/>
+          </a:p>
+        </p:txBody>
       </p:sp>
       <p:sp>
         <p:nvSpPr>
@@ -4558,7 +4501,7 @@
           <a:bodyPr wrap="square" lIns="0" tIns="0" rIns="0" bIns="0" rtlCol="0" anchor="t"/>
           <a:lstStyle/>
           <a:p>
-            <a:pPr indent="0" marL="0">
+            <a:pPr marL="0" indent="0">
               <a:buNone/>
             </a:pPr>
             <a:r>
@@ -4597,7 +4540,7 @@
           <a:bodyPr wrap="square" lIns="0" tIns="0" rIns="0" bIns="0" rtlCol="0" anchor="t"/>
           <a:lstStyle/>
           <a:p>
-            <a:pPr indent="0" marL="0">
+            <a:pPr marL="0" indent="0">
               <a:buNone/>
             </a:pPr>
             <a:r>
@@ -4614,7 +4557,7 @@
             <a:endParaRPr lang="en-US" sz="1400" dirty="0"/>
           </a:p>
           <a:p>
-            <a:pPr indent="0" marL="0">
+            <a:pPr marL="0" indent="0">
               <a:buNone/>
             </a:pPr>
             <a:r>
@@ -4631,7 +4574,7 @@
             <a:endParaRPr lang="en-US" sz="1400" dirty="0"/>
           </a:p>
           <a:p>
-            <a:pPr indent="0" marL="0">
+            <a:pPr marL="0" indent="0">
               <a:buNone/>
             </a:pPr>
             <a:r>
@@ -4670,11 +4613,11 @@
           <a:bodyPr wrap="square" rtlCol="0" anchor="ctr"/>
           <a:lstStyle/>
           <a:p>
-            <a:pPr indent="0" marL="0">
-              <a:buNone/>
-            </a:pPr>
-            <a:r>
-              <a:rPr lang="en-US" sz="900" spc="200" kern="0" dirty="0">
+            <a:pPr marL="0" indent="0">
+              <a:buNone/>
+            </a:pPr>
+            <a:r>
+              <a:rPr lang="en-US" sz="900" kern="0" spc="200" dirty="0">
                 <a:solidFill>
                   <a:srgbClr val="7A8A95"/>
                 </a:solidFill>
@@ -4709,7 +4652,7 @@
           <a:bodyPr wrap="square" rtlCol="0" anchor="ctr"/>
           <a:lstStyle/>
           <a:p>
-            <a:pPr algn="r" indent="0" marL="0">
+            <a:pPr marL="0" indent="0" algn="r">
               <a:buNone/>
             </a:pPr>
             <a:r>
@@ -4743,6 +4686,7 @@
         <a:solidFill>
           <a:srgbClr val="FFFFFF"/>
         </a:solidFill>
+        <a:effectLst/>
       </p:bgPr>
     </p:bg>
     <p:spTree>
@@ -4780,7 +4724,7 @@
           <a:bodyPr wrap="square" lIns="0" tIns="0" rIns="0" bIns="0" rtlCol="0" anchor="t"/>
           <a:lstStyle/>
           <a:p>
-            <a:pPr indent="0" marL="0">
+            <a:pPr marL="0" indent="0">
               <a:buNone/>
             </a:pPr>
             <a:r>
@@ -4824,6 +4768,13 @@
             <a:prstDash val="solid"/>
           </a:ln>
         </p:spPr>
+        <p:txBody>
+          <a:bodyPr/>
+          <a:lstStyle/>
+          <a:p>
+            <a:endParaRPr lang="de-CH"/>
+          </a:p>
+        </p:txBody>
       </p:sp>
       <p:sp>
         <p:nvSpPr>
@@ -4851,6 +4802,13 @@
             <a:prstDash val="solid"/>
           </a:ln>
         </p:spPr>
+        <p:txBody>
+          <a:bodyPr/>
+          <a:lstStyle/>
+          <a:p>
+            <a:endParaRPr lang="de-CH"/>
+          </a:p>
+        </p:txBody>
       </p:sp>
       <p:sp>
         <p:nvSpPr>
@@ -4873,7 +4831,7 @@
           <a:bodyPr wrap="square" lIns="0" tIns="0" rIns="0" bIns="0" rtlCol="0" anchor="t"/>
           <a:lstStyle/>
           <a:p>
-            <a:pPr indent="0" marL="0">
+            <a:pPr marL="0" indent="0">
               <a:buNone/>
             </a:pPr>
             <a:r>
@@ -4912,7 +4870,7 @@
           <a:bodyPr wrap="square" lIns="0" tIns="0" rIns="0" bIns="0" rtlCol="0" anchor="t"/>
           <a:lstStyle/>
           <a:p>
-            <a:pPr indent="0" marL="0">
+            <a:pPr marL="0" indent="0">
               <a:buNone/>
             </a:pPr>
             <a:r>
@@ -4929,7 +4887,7 @@
             <a:endParaRPr lang="en-US" sz="1500" dirty="0"/>
           </a:p>
           <a:p>
-            <a:pPr indent="0" marL="0">
+            <a:pPr marL="0" indent="0">
               <a:buNone/>
             </a:pPr>
             <a:r>
@@ -4946,7 +4904,7 @@
             <a:endParaRPr lang="en-US" sz="1500" dirty="0"/>
           </a:p>
           <a:p>
-            <a:pPr indent="0" marL="0">
+            <a:pPr marL="0" indent="0">
               <a:buNone/>
             </a:pPr>
             <a:r>
@@ -4990,6 +4948,13 @@
             <a:prstDash val="solid"/>
           </a:ln>
         </p:spPr>
+        <p:txBody>
+          <a:bodyPr/>
+          <a:lstStyle/>
+          <a:p>
+            <a:endParaRPr lang="de-CH"/>
+          </a:p>
+        </p:txBody>
       </p:sp>
       <p:sp>
         <p:nvSpPr>
@@ -5017,6 +4982,13 @@
             <a:prstDash val="solid"/>
           </a:ln>
         </p:spPr>
+        <p:txBody>
+          <a:bodyPr/>
+          <a:lstStyle/>
+          <a:p>
+            <a:endParaRPr lang="de-CH"/>
+          </a:p>
+        </p:txBody>
       </p:sp>
       <p:sp>
         <p:nvSpPr>
@@ -5039,7 +5011,7 @@
           <a:bodyPr wrap="square" lIns="0" tIns="0" rIns="0" bIns="0" rtlCol="0" anchor="t"/>
           <a:lstStyle/>
           <a:p>
-            <a:pPr indent="0" marL="0">
+            <a:pPr marL="0" indent="0">
               <a:buNone/>
             </a:pPr>
             <a:r>
@@ -5078,7 +5050,7 @@
           <a:bodyPr wrap="square" lIns="0" tIns="0" rIns="0" bIns="0" rtlCol="0" anchor="t"/>
           <a:lstStyle/>
           <a:p>
-            <a:pPr indent="0" marL="0">
+            <a:pPr marL="0" indent="0">
               <a:buNone/>
             </a:pPr>
             <a:r>
@@ -5095,7 +5067,7 @@
             <a:endParaRPr lang="en-US" sz="1500" dirty="0"/>
           </a:p>
           <a:p>
-            <a:pPr indent="0" marL="0">
+            <a:pPr marL="0" indent="0">
               <a:buNone/>
             </a:pPr>
             <a:r>
@@ -5112,7 +5084,7 @@
             <a:endParaRPr lang="en-US" sz="1500" dirty="0"/>
           </a:p>
           <a:p>
-            <a:pPr indent="0" marL="0">
+            <a:pPr marL="0" indent="0">
               <a:buNone/>
             </a:pPr>
             <a:r>
@@ -5156,6 +5128,13 @@
             <a:prstDash val="solid"/>
           </a:ln>
         </p:spPr>
+        <p:txBody>
+          <a:bodyPr/>
+          <a:lstStyle/>
+          <a:p>
+            <a:endParaRPr lang="de-CH"/>
+          </a:p>
+        </p:txBody>
       </p:sp>
       <p:sp>
         <p:nvSpPr>
@@ -5183,6 +5162,13 @@
             <a:prstDash val="solid"/>
           </a:ln>
         </p:spPr>
+        <p:txBody>
+          <a:bodyPr/>
+          <a:lstStyle/>
+          <a:p>
+            <a:endParaRPr lang="de-CH"/>
+          </a:p>
+        </p:txBody>
       </p:sp>
       <p:sp>
         <p:nvSpPr>
@@ -5205,11 +5191,11 @@
           <a:bodyPr wrap="square" lIns="0" tIns="0" rIns="0" bIns="0" rtlCol="0" anchor="t"/>
           <a:lstStyle/>
           <a:p>
-            <a:pPr indent="0" marL="0">
-              <a:buNone/>
-            </a:pPr>
-            <a:r>
-              <a:rPr lang="en-US" sz="2200" b="1" dirty="0">
+            <a:pPr marL="0" indent="0">
+              <a:buNone/>
+            </a:pPr>
+            <a:r>
+              <a:rPr lang="en-US" b="1" dirty="0">
                 <a:solidFill>
                   <a:srgbClr val="1A3A4A"/>
                 </a:solidFill>
@@ -5244,7 +5230,7 @@
           <a:bodyPr wrap="square" lIns="0" tIns="0" rIns="0" bIns="0" rtlCol="0" anchor="t"/>
           <a:lstStyle/>
           <a:p>
-            <a:pPr indent="0" marL="0">
+            <a:pPr marL="0" indent="0">
               <a:buNone/>
             </a:pPr>
             <a:r>
@@ -5261,7 +5247,7 @@
             <a:endParaRPr lang="en-US" sz="1500" dirty="0"/>
           </a:p>
           <a:p>
-            <a:pPr indent="0" marL="0">
+            <a:pPr marL="0" indent="0">
               <a:buNone/>
             </a:pPr>
             <a:r>
@@ -5278,7 +5264,7 @@
             <a:endParaRPr lang="en-US" sz="1500" dirty="0"/>
           </a:p>
           <a:p>
-            <a:pPr indent="0" marL="0">
+            <a:pPr marL="0" indent="0">
               <a:buNone/>
             </a:pPr>
             <a:r>
@@ -5317,11 +5303,11 @@
           <a:bodyPr wrap="square" rtlCol="0" anchor="ctr"/>
           <a:lstStyle/>
           <a:p>
-            <a:pPr indent="0" marL="0">
-              <a:buNone/>
-            </a:pPr>
-            <a:r>
-              <a:rPr lang="en-US" sz="900" spc="200" kern="0" dirty="0">
+            <a:pPr marL="0" indent="0">
+              <a:buNone/>
+            </a:pPr>
+            <a:r>
+              <a:rPr lang="en-US" sz="900" kern="0" spc="200" dirty="0">
                 <a:solidFill>
                   <a:srgbClr val="7A8A95"/>
                 </a:solidFill>
@@ -5356,7 +5342,7 @@
           <a:bodyPr wrap="square" rtlCol="0" anchor="ctr"/>
           <a:lstStyle/>
           <a:p>
-            <a:pPr algn="r" indent="0" marL="0">
+            <a:pPr marL="0" indent="0" algn="r">
               <a:buNone/>
             </a:pPr>
             <a:r>
@@ -5390,6 +5376,7 @@
         <a:solidFill>
           <a:srgbClr val="FFFFFF"/>
         </a:solidFill>
+        <a:effectLst/>
       </p:bgPr>
     </p:bg>
     <p:spTree>
@@ -5427,7 +5414,7 @@
           <a:bodyPr wrap="square" lIns="0" tIns="0" rIns="0" bIns="0" rtlCol="0" anchor="t"/>
           <a:lstStyle/>
           <a:p>
-            <a:pPr indent="0" marL="0">
+            <a:pPr marL="0" indent="0">
               <a:buNone/>
             </a:pPr>
             <a:r>
@@ -5454,22 +5441,34 @@
           <p:nvPr>
             <p:extLst>
               <p:ext uri="{D42A27DB-BD31-4B8C-83A1-F6EECF244321}">
-                <p14:modId xmlns:p14="http://schemas.microsoft.com/office/powerpoint/2010/main" val="1579011935"/>
+                <p14:modId xmlns:p14="http://schemas.microsoft.com/office/powerpoint/2010/main" val="2266700944"/>
               </p:ext>
             </p:extLst>
           </p:nvPr>
         </p:nvGraphicFramePr>
         <p:xfrm>
-          <a:off x="548640" y="1920240"/>
-          <a:ext cx="8046720" cy="914400"/>
+          <a:off x="548640" y="1554480"/>
+          <a:ext cx="8046720" cy="2834640"/>
         </p:xfrm>
         <a:graphic>
           <a:graphicData uri="http://schemas.openxmlformats.org/drawingml/2006/table">
             <a:tbl>
               <a:tblPr/>
               <a:tblGrid>
-                <a:gridCol w="3200400"/>
-                <a:gridCol w="4846320"/>
+                <a:gridCol w="3200400">
+                  <a:extLst>
+                    <a:ext uri="{9D8B030D-6E8A-4147-A177-3AD203B41FA5}">
+                      <a16:colId xmlns:a16="http://schemas.microsoft.com/office/drawing/2014/main" val="20000"/>
+                    </a:ext>
+                  </a:extLst>
+                </a:gridCol>
+                <a:gridCol w="4846320">
+                  <a:extLst>
+                    <a:ext uri="{9D8B030D-6E8A-4147-A177-3AD203B41FA5}">
+                      <a16:colId xmlns:a16="http://schemas.microsoft.com/office/drawing/2014/main" val="20001"/>
+                    </a:ext>
+                  </a:extLst>
+                </a:gridCol>
               </a:tblGrid>
               <a:tr h="457200">
                 <a:tc>
@@ -5477,11 +5476,11 @@
                     <a:bodyPr/>
                     <a:lstStyle/>
                     <a:p>
-                      <a:pPr indent="0" marL="0">
+                      <a:pPr marL="0" indent="0">
                         <a:buNone/>
                       </a:pPr>
                       <a:r>
-                        <a:rPr lang="en-US" sz="1100" b="1" spc="300" kern="0" dirty="0">
+                        <a:rPr lang="en-US" sz="1100" b="1" kern="0" spc="300" dirty="0">
                           <a:solidFill>
                             <a:srgbClr val="7A8A95"/>
                           </a:solidFill>
@@ -5498,7 +5497,7 @@
                       </a:endParaRPr>
                     </a:p>
                   </a:txBody>
-                  <a:tcPr marL="91440" marR="91440" marT="45720" marB="45720">
+                  <a:tcPr>
                     <a:lnL w="0" cap="flat" cmpd="sng" algn="ctr">
                       <a:solidFill>
                         <a:srgbClr val="FFFFFF"/>
@@ -5545,11 +5544,11 @@
                     <a:bodyPr/>
                     <a:lstStyle/>
                     <a:p>
-                      <a:pPr indent="0" marL="0">
+                      <a:pPr marL="0" indent="0">
                         <a:buNone/>
                       </a:pPr>
                       <a:r>
-                        <a:rPr lang="en-US" sz="1100" b="1" spc="300" kern="0" dirty="0">
+                        <a:rPr lang="en-US" sz="1100" b="1" kern="0" spc="300" dirty="0">
                           <a:solidFill>
                             <a:srgbClr val="DC822E"/>
                           </a:solidFill>
@@ -5566,7 +5565,7 @@
                       </a:endParaRPr>
                     </a:p>
                   </a:txBody>
-                  <a:tcPr marL="91440" marR="91440" marT="45720" marB="45720">
+                  <a:tcPr>
                     <a:lnL w="0" cap="flat" cmpd="sng" algn="ctr">
                       <a:solidFill>
                         <a:srgbClr val="FFFFFF"/>
@@ -5608,6 +5607,11 @@
                     </a:solidFill>
                   </a:tcPr>
                 </a:tc>
+                <a:extLst>
+                  <a:ext uri="{0D108BD9-81ED-4DB2-BD59-A6C34878D82A}">
+                    <a16:rowId xmlns:a16="http://schemas.microsoft.com/office/drawing/2014/main" val="10000"/>
+                  </a:ext>
+                </a:extLst>
               </a:tr>
               <a:tr h="594360">
                 <a:tc>
@@ -5615,7 +5619,7 @@
                     <a:bodyPr/>
                     <a:lstStyle/>
                     <a:p>
-                      <a:pPr indent="0" marL="0">
+                      <a:pPr marL="0" indent="0">
                         <a:buNone/>
                       </a:pPr>
                       <a:r>
@@ -5636,7 +5640,7 @@
                       </a:endParaRPr>
                     </a:p>
                   </a:txBody>
-                  <a:tcPr marL="91440" marR="91440" marT="45720" marB="45720">
+                  <a:tcPr>
                     <a:lnL w="0" cap="flat" cmpd="sng" algn="ctr">
                       <a:solidFill>
                         <a:srgbClr val="FFFFFF"/>
@@ -5683,7 +5687,7 @@
                     <a:bodyPr/>
                     <a:lstStyle/>
                     <a:p>
-                      <a:pPr indent="0" marL="0">
+                      <a:pPr marL="0" indent="0">
                         <a:buNone/>
                       </a:pPr>
                       <a:r>
@@ -5704,7 +5708,7 @@
                       </a:endParaRPr>
                     </a:p>
                   </a:txBody>
-                  <a:tcPr marL="91440" marR="91440" marT="45720" marB="45720">
+                  <a:tcPr>
                     <a:lnL w="0" cap="flat" cmpd="sng" algn="ctr">
                       <a:solidFill>
                         <a:srgbClr val="FFFFFF"/>
@@ -5746,6 +5750,11 @@
                     </a:solidFill>
                   </a:tcPr>
                 </a:tc>
+                <a:extLst>
+                  <a:ext uri="{0D108BD9-81ED-4DB2-BD59-A6C34878D82A}">
+                    <a16:rowId xmlns:a16="http://schemas.microsoft.com/office/drawing/2014/main" val="10001"/>
+                  </a:ext>
+                </a:extLst>
               </a:tr>
               <a:tr h="594360">
                 <a:tc>
@@ -5753,7 +5762,7 @@
                     <a:bodyPr/>
                     <a:lstStyle/>
                     <a:p>
-                      <a:pPr indent="0" marL="0">
+                      <a:pPr marL="0" indent="0">
                         <a:buNone/>
                       </a:pPr>
                       <a:r>
@@ -5774,7 +5783,7 @@
                       </a:endParaRPr>
                     </a:p>
                   </a:txBody>
-                  <a:tcPr marL="91440" marR="91440" marT="45720" marB="45720">
+                  <a:tcPr>
                     <a:lnL w="0" cap="flat" cmpd="sng" algn="ctr">
                       <a:solidFill>
                         <a:srgbClr val="FFFFFF"/>
@@ -5821,7 +5830,7 @@
                     <a:bodyPr/>
                     <a:lstStyle/>
                     <a:p>
-                      <a:pPr indent="0" marL="0">
+                      <a:pPr marL="0" indent="0">
                         <a:buNone/>
                       </a:pPr>
                       <a:r>
@@ -5842,7 +5851,7 @@
                       </a:endParaRPr>
                     </a:p>
                   </a:txBody>
-                  <a:tcPr marL="91440" marR="91440" marT="45720" marB="45720">
+                  <a:tcPr>
                     <a:lnL w="0" cap="flat" cmpd="sng" algn="ctr">
                       <a:solidFill>
                         <a:srgbClr val="FFFFFF"/>
@@ -5884,6 +5893,11 @@
                     </a:solidFill>
                   </a:tcPr>
                 </a:tc>
+                <a:extLst>
+                  <a:ext uri="{0D108BD9-81ED-4DB2-BD59-A6C34878D82A}">
+                    <a16:rowId xmlns:a16="http://schemas.microsoft.com/office/drawing/2014/main" val="10002"/>
+                  </a:ext>
+                </a:extLst>
               </a:tr>
               <a:tr h="594360">
                 <a:tc>
@@ -5891,7 +5905,7 @@
                     <a:bodyPr/>
                     <a:lstStyle/>
                     <a:p>
-                      <a:pPr indent="0" marL="0">
+                      <a:pPr marL="0" indent="0">
                         <a:buNone/>
                       </a:pPr>
                       <a:r>
@@ -5912,7 +5926,7 @@
                       </a:endParaRPr>
                     </a:p>
                   </a:txBody>
-                  <a:tcPr marL="91440" marR="91440" marT="45720" marB="45720">
+                  <a:tcPr>
                     <a:lnL w="0" cap="flat" cmpd="sng" algn="ctr">
                       <a:solidFill>
                         <a:srgbClr val="FFFFFF"/>
@@ -5959,7 +5973,7 @@
                     <a:bodyPr/>
                     <a:lstStyle/>
                     <a:p>
-                      <a:pPr indent="0" marL="0">
+                      <a:pPr marL="0" indent="0">
                         <a:buNone/>
                       </a:pPr>
                       <a:r>
@@ -5980,7 +5994,7 @@
                       </a:endParaRPr>
                     </a:p>
                   </a:txBody>
-                  <a:tcPr marL="91440" marR="91440" marT="45720" marB="45720">
+                  <a:tcPr>
                     <a:lnL w="0" cap="flat" cmpd="sng" algn="ctr">
                       <a:solidFill>
                         <a:srgbClr val="FFFFFF"/>
@@ -6022,6 +6036,11 @@
                     </a:solidFill>
                   </a:tcPr>
                 </a:tc>
+                <a:extLst>
+                  <a:ext uri="{0D108BD9-81ED-4DB2-BD59-A6C34878D82A}">
+                    <a16:rowId xmlns:a16="http://schemas.microsoft.com/office/drawing/2014/main" val="10003"/>
+                  </a:ext>
+                </a:extLst>
               </a:tr>
               <a:tr h="594360">
                 <a:tc>
@@ -6029,7 +6048,7 @@
                     <a:bodyPr/>
                     <a:lstStyle/>
                     <a:p>
-                      <a:pPr indent="0" marL="0">
+                      <a:pPr marL="0" indent="0">
                         <a:buNone/>
                       </a:pPr>
                       <a:r>
@@ -6050,7 +6069,7 @@
                       </a:endParaRPr>
                     </a:p>
                   </a:txBody>
-                  <a:tcPr marL="91440" marR="91440" marT="45720" marB="45720">
+                  <a:tcPr>
                     <a:lnL w="0" cap="flat" cmpd="sng" algn="ctr">
                       <a:solidFill>
                         <a:srgbClr val="FFFFFF"/>
@@ -6097,7 +6116,7 @@
                     <a:bodyPr/>
                     <a:lstStyle/>
                     <a:p>
-                      <a:pPr indent="0" marL="0">
+                      <a:pPr marL="0" indent="0">
                         <a:buNone/>
                       </a:pPr>
                       <a:r>
@@ -6118,7 +6137,7 @@
                       </a:endParaRPr>
                     </a:p>
                   </a:txBody>
-                  <a:tcPr marL="91440" marR="91440" marT="45720" marB="45720">
+                  <a:tcPr>
                     <a:lnL w="0" cap="flat" cmpd="sng" algn="ctr">
                       <a:solidFill>
                         <a:srgbClr val="FFFFFF"/>
@@ -6160,6 +6179,11 @@
                     </a:solidFill>
                   </a:tcPr>
                 </a:tc>
+                <a:extLst>
+                  <a:ext uri="{0D108BD9-81ED-4DB2-BD59-A6C34878D82A}">
+                    <a16:rowId xmlns:a16="http://schemas.microsoft.com/office/drawing/2014/main" val="10004"/>
+                  </a:ext>
+                </a:extLst>
               </a:tr>
             </a:tbl>
           </a:graphicData>
@@ -6186,11 +6210,11 @@
           <a:bodyPr wrap="square" rtlCol="0" anchor="ctr"/>
           <a:lstStyle/>
           <a:p>
-            <a:pPr indent="0" marL="0">
-              <a:buNone/>
-            </a:pPr>
-            <a:r>
-              <a:rPr lang="en-US" sz="900" spc="200" kern="0" dirty="0">
+            <a:pPr marL="0" indent="0">
+              <a:buNone/>
+            </a:pPr>
+            <a:r>
+              <a:rPr lang="en-US" sz="900" kern="0" spc="200" dirty="0">
                 <a:solidFill>
                   <a:srgbClr val="7A8A95"/>
                 </a:solidFill>
@@ -6225,7 +6249,7 @@
           <a:bodyPr wrap="square" rtlCol="0" anchor="ctr"/>
           <a:lstStyle/>
           <a:p>
-            <a:pPr algn="r" indent="0" marL="0">
+            <a:pPr marL="0" indent="0" algn="r">
               <a:buNone/>
             </a:pPr>
             <a:r>
@@ -6259,6 +6283,7 @@
         <a:solidFill>
           <a:srgbClr val="FFFFFF"/>
         </a:solidFill>
+        <a:effectLst/>
       </p:bgPr>
     </p:bg>
     <p:spTree>
@@ -6296,11 +6321,11 @@
           <a:bodyPr wrap="square" rtlCol="0" anchor="ctr"/>
           <a:lstStyle/>
           <a:p>
-            <a:pPr indent="0" marL="0">
-              <a:buNone/>
-            </a:pPr>
-            <a:r>
-              <a:rPr lang="en-US" sz="1000" b="1" spc="400" kern="0" dirty="0">
+            <a:pPr marL="0" indent="0">
+              <a:buNone/>
+            </a:pPr>
+            <a:r>
+              <a:rPr lang="en-US" sz="1000" b="1" kern="0" spc="400" dirty="0">
                 <a:solidFill>
                   <a:srgbClr val="DC822E"/>
                 </a:solidFill>
@@ -6335,11 +6360,11 @@
           <a:bodyPr wrap="square" lIns="0" tIns="0" rIns="0" bIns="0" rtlCol="0" anchor="t"/>
           <a:lstStyle/>
           <a:p>
-            <a:pPr indent="0" marL="0">
-              <a:buNone/>
-            </a:pPr>
-            <a:r>
-              <a:rPr lang="en-US" sz="3600" b="1" dirty="0">
+            <a:pPr marL="0" indent="0">
+              <a:buNone/>
+            </a:pPr>
+            <a:r>
+              <a:rPr lang="en-US" sz="2800" b="1" dirty="0">
                 <a:solidFill>
                   <a:srgbClr val="1A3A4A"/>
                 </a:solidFill>
@@ -6349,7 +6374,7 @@
               </a:rPr>
               <a:t>Mai 2025 — als ich aufgehört habe Mama zu sein die nebenher ein Business hat</a:t>
             </a:r>
-            <a:endParaRPr lang="en-US" sz="3600" dirty="0"/>
+            <a:endParaRPr lang="en-US" sz="2800" dirty="0"/>
           </a:p>
         </p:txBody>
       </p:sp>
@@ -6390,7 +6415,95 @@
                 <a:ea typeface="Calibri" pitchFamily="34" charset="-122"/>
                 <a:cs typeface="Calibri" pitchFamily="34" charset="-120"/>
               </a:rPr>
-              <a:t>Glaubenssatz alt: „Ich bin Mama von 4 — Business ist nur möglich wenn es leise ist"</a:t>
+              <a:t>Glaubenssatz alt: „Ich bin Mama von 4 — Business </a:t>
+            </a:r>
+            <a:r>
+              <a:rPr lang="en-US" sz="1600" dirty="0" err="1">
+                <a:solidFill>
+                  <a:srgbClr val="2C3E50"/>
+                </a:solidFill>
+                <a:latin typeface="Calibri" pitchFamily="34" charset="0"/>
+                <a:ea typeface="Calibri" pitchFamily="34" charset="-122"/>
+                <a:cs typeface="Calibri" pitchFamily="34" charset="-120"/>
+              </a:rPr>
+              <a:t>geht</a:t>
+            </a:r>
+            <a:r>
+              <a:rPr lang="en-US" sz="1600" dirty="0">
+                <a:solidFill>
+                  <a:srgbClr val="2C3E50"/>
+                </a:solidFill>
+                <a:latin typeface="Calibri" pitchFamily="34" charset="0"/>
+                <a:ea typeface="Calibri" pitchFamily="34" charset="-122"/>
+                <a:cs typeface="Calibri" pitchFamily="34" charset="-120"/>
+              </a:rPr>
+              <a:t> </a:t>
+            </a:r>
+            <a:r>
+              <a:rPr lang="en-US" sz="1600" dirty="0" err="1">
+                <a:solidFill>
+                  <a:srgbClr val="2C3E50"/>
+                </a:solidFill>
+                <a:latin typeface="Calibri" pitchFamily="34" charset="0"/>
+                <a:ea typeface="Calibri" pitchFamily="34" charset="-122"/>
+                <a:cs typeface="Calibri" pitchFamily="34" charset="-120"/>
+              </a:rPr>
+              <a:t>nur</a:t>
+            </a:r>
+            <a:r>
+              <a:rPr lang="en-US" sz="1600" dirty="0">
+                <a:solidFill>
+                  <a:srgbClr val="2C3E50"/>
+                </a:solidFill>
+                <a:latin typeface="Calibri" pitchFamily="34" charset="0"/>
+                <a:ea typeface="Calibri" pitchFamily="34" charset="-122"/>
+                <a:cs typeface="Calibri" pitchFamily="34" charset="-120"/>
+              </a:rPr>
+              <a:t>, </a:t>
+            </a:r>
+            <a:r>
+              <a:rPr lang="en-US" sz="1600" dirty="0" err="1">
+                <a:solidFill>
+                  <a:srgbClr val="2C3E50"/>
+                </a:solidFill>
+                <a:latin typeface="Calibri" pitchFamily="34" charset="0"/>
+                <a:ea typeface="Calibri" pitchFamily="34" charset="-122"/>
+                <a:cs typeface="Calibri" pitchFamily="34" charset="-120"/>
+              </a:rPr>
+              <a:t>wenn</a:t>
+            </a:r>
+            <a:r>
+              <a:rPr lang="en-US" sz="1600" dirty="0">
+                <a:solidFill>
+                  <a:srgbClr val="2C3E50"/>
+                </a:solidFill>
+                <a:latin typeface="Calibri" pitchFamily="34" charset="0"/>
+                <a:ea typeface="Calibri" pitchFamily="34" charset="-122"/>
+                <a:cs typeface="Calibri" pitchFamily="34" charset="-120"/>
+              </a:rPr>
+              <a:t> die Kids nicht da </a:t>
+            </a:r>
+            <a:r>
+              <a:rPr lang="en-US" sz="1600" dirty="0" err="1">
+                <a:solidFill>
+                  <a:srgbClr val="2C3E50"/>
+                </a:solidFill>
+                <a:latin typeface="Calibri" pitchFamily="34" charset="0"/>
+                <a:ea typeface="Calibri" pitchFamily="34" charset="-122"/>
+                <a:cs typeface="Calibri" pitchFamily="34" charset="-120"/>
+              </a:rPr>
+              <a:t>sind</a:t>
+            </a:r>
+            <a:r>
+              <a:rPr lang="en-US" sz="1600" dirty="0">
+                <a:solidFill>
+                  <a:srgbClr val="2C3E50"/>
+                </a:solidFill>
+                <a:latin typeface="Calibri" pitchFamily="34" charset="0"/>
+                <a:ea typeface="Calibri" pitchFamily="34" charset="-122"/>
+                <a:cs typeface="Calibri" pitchFamily="34" charset="-120"/>
+              </a:rPr>
+              <a:t>"</a:t>
             </a:r>
             <a:endParaRPr lang="en-US" sz="1600" dirty="0"/>
           </a:p>
@@ -6403,6 +6516,17 @@
               <a:buChar char="●"/>
             </a:pPr>
             <a:r>
+              <a:rPr lang="en-US" sz="1600" dirty="0" err="1">
+                <a:solidFill>
+                  <a:srgbClr val="2C3E50"/>
+                </a:solidFill>
+                <a:latin typeface="Calibri" pitchFamily="34" charset="0"/>
+                <a:ea typeface="Calibri" pitchFamily="34" charset="-122"/>
+                <a:cs typeface="Calibri" pitchFamily="34" charset="-120"/>
+              </a:rPr>
+              <a:t>Identität</a:t>
+            </a:r>
+            <a:r>
               <a:rPr lang="en-US" sz="1600" dirty="0">
                 <a:solidFill>
                   <a:srgbClr val="2C3E50"/>
@@ -6411,7 +6535,7 @@
                 <a:ea typeface="Calibri" pitchFamily="34" charset="-122"/>
                 <a:cs typeface="Calibri" pitchFamily="34" charset="-120"/>
               </a:rPr>
-              <a:t>Wendepunkt: ich verstand dass ich es DARF, sichtbar zu sein</a:t>
+              <a:t> neu: „Ich bin Mompreneurin. Auch um 9 Uhr am Vormittag."</a:t>
             </a:r>
             <a:endParaRPr lang="en-US" sz="1600" dirty="0"/>
           </a:p>
@@ -6432,7 +6556,7 @@
                 <a:ea typeface="Calibri" pitchFamily="34" charset="-122"/>
                 <a:cs typeface="Calibri" pitchFamily="34" charset="-120"/>
               </a:rPr>
-              <a:t>Identität neu: „Ich bin Mompreneurin. Auch um 9 Uhr am Vormittag."</a:t>
+              <a:t>Verhalten folgte automatisch: Webinar geplant, Sales-Page gebaut, Kurs verkauft</a:t>
             </a:r>
             <a:endParaRPr lang="en-US" sz="1600" dirty="0"/>
           </a:p>
@@ -6453,18 +6577,19 @@
                 <a:ea typeface="Calibri" pitchFamily="34" charset="-122"/>
                 <a:cs typeface="Calibri" pitchFamily="34" charset="-120"/>
               </a:rPr>
-              <a:t>Verhalten folgte automatisch: Webinar geplant, Sales-Page gebaut, Kurs verkauft</a:t>
-            </a:r>
-            <a:endParaRPr lang="en-US" sz="1600" dirty="0"/>
-          </a:p>
-          <a:p>
-            <a:pPr marL="342900" indent="-342900">
-              <a:spcAft>
-                <a:spcPts val="800"/>
-              </a:spcAft>
-              <a:buSzPct val="100000"/>
-              <a:buChar char="●"/>
-            </a:pPr>
+              <a:t>Niemand hat </a:t>
+            </a:r>
+            <a:r>
+              <a:rPr lang="en-US" sz="1600" dirty="0" err="1">
+                <a:solidFill>
+                  <a:srgbClr val="2C3E50"/>
+                </a:solidFill>
+                <a:latin typeface="Calibri" pitchFamily="34" charset="0"/>
+                <a:ea typeface="Calibri" pitchFamily="34" charset="-122"/>
+                <a:cs typeface="Calibri" pitchFamily="34" charset="-120"/>
+              </a:rPr>
+              <a:t>mich</a:t>
+            </a:r>
             <a:r>
               <a:rPr lang="en-US" sz="1600" dirty="0">
                 <a:solidFill>
@@ -6474,7 +6599,29 @@
                 <a:ea typeface="Calibri" pitchFamily="34" charset="-122"/>
                 <a:cs typeface="Calibri" pitchFamily="34" charset="-120"/>
               </a:rPr>
-              <a:t>Niemand hat mich gerettet — ich habe mich neu definiert</a:t>
+              <a:t> </a:t>
+            </a:r>
+            <a:r>
+              <a:rPr lang="en-US" sz="1600" dirty="0" err="1">
+                <a:solidFill>
+                  <a:srgbClr val="2C3E50"/>
+                </a:solidFill>
+                <a:latin typeface="Calibri" pitchFamily="34" charset="0"/>
+                <a:ea typeface="Calibri" pitchFamily="34" charset="-122"/>
+                <a:cs typeface="Calibri" pitchFamily="34" charset="-120"/>
+              </a:rPr>
+              <a:t>eingeladen</a:t>
+            </a:r>
+            <a:r>
+              <a:rPr lang="en-US" sz="1600" dirty="0">
+                <a:solidFill>
+                  <a:srgbClr val="2C3E50"/>
+                </a:solidFill>
+                <a:latin typeface="Calibri" pitchFamily="34" charset="0"/>
+                <a:ea typeface="Calibri" pitchFamily="34" charset="-122"/>
+                <a:cs typeface="Calibri" pitchFamily="34" charset="-120"/>
+              </a:rPr>
+              <a:t> — ich habe mich neu definiert</a:t>
             </a:r>
             <a:endParaRPr lang="en-US" sz="1600" dirty="0"/>
           </a:p>
@@ -6506,6 +6653,13 @@
             <a:prstDash val="solid"/>
           </a:ln>
         </p:spPr>
+        <p:txBody>
+          <a:bodyPr/>
+          <a:lstStyle/>
+          <a:p>
+            <a:endParaRPr lang="de-CH"/>
+          </a:p>
+        </p:txBody>
       </p:sp>
       <p:sp>
         <p:nvSpPr>
@@ -6533,6 +6687,13 @@
             <a:prstDash val="solid"/>
           </a:ln>
         </p:spPr>
+        <p:txBody>
+          <a:bodyPr/>
+          <a:lstStyle/>
+          <a:p>
+            <a:endParaRPr lang="de-CH"/>
+          </a:p>
+        </p:txBody>
       </p:sp>
       <p:sp>
         <p:nvSpPr>
@@ -6555,11 +6716,11 @@
           <a:bodyPr wrap="square" rtlCol="0" anchor="ctr"/>
           <a:lstStyle/>
           <a:p>
-            <a:pPr indent="0" marL="0">
-              <a:buNone/>
-            </a:pPr>
-            <a:r>
-              <a:rPr lang="en-US" sz="900" b="1" spc="400" kern="0" dirty="0">
+            <a:pPr marL="0" indent="0">
+              <a:buNone/>
+            </a:pPr>
+            <a:r>
+              <a:rPr lang="en-US" sz="900" b="1" kern="0" spc="400" dirty="0">
                 <a:solidFill>
                   <a:srgbClr val="DC822E"/>
                 </a:solidFill>
@@ -6594,7 +6755,7 @@
           <a:bodyPr wrap="square" lIns="0" tIns="0" rIns="0" bIns="0" rtlCol="0" anchor="t"/>
           <a:lstStyle/>
           <a:p>
-            <a:pPr indent="0" marL="0">
+            <a:pPr marL="0" indent="0">
               <a:buNone/>
             </a:pPr>
             <a:r>
@@ -6633,11 +6794,11 @@
           <a:bodyPr wrap="square" rtlCol="0" anchor="ctr"/>
           <a:lstStyle/>
           <a:p>
-            <a:pPr indent="0" marL="0">
-              <a:buNone/>
-            </a:pPr>
-            <a:r>
-              <a:rPr lang="en-US" sz="900" spc="200" kern="0" dirty="0">
+            <a:pPr marL="0" indent="0">
+              <a:buNone/>
+            </a:pPr>
+            <a:r>
+              <a:rPr lang="en-US" sz="900" kern="0" spc="200" dirty="0">
                 <a:solidFill>
                   <a:srgbClr val="7A8A95"/>
                 </a:solidFill>
@@ -6672,7 +6833,7 @@
           <a:bodyPr wrap="square" rtlCol="0" anchor="ctr"/>
           <a:lstStyle/>
           <a:p>
-            <a:pPr algn="r" indent="0" marL="0">
+            <a:pPr marL="0" indent="0" algn="r">
               <a:buNone/>
             </a:pPr>
             <a:r>
@@ -6706,6 +6867,7 @@
         <a:solidFill>
           <a:srgbClr val="12828C"/>
         </a:solidFill>
+        <a:effectLst/>
       </p:bgPr>
     </p:bg>
     <p:spTree>
@@ -6743,11 +6905,11 @@
           <a:bodyPr wrap="square" rtlCol="0" anchor="ctr"/>
           <a:lstStyle/>
           <a:p>
-            <a:pPr indent="0" marL="0">
-              <a:buNone/>
-            </a:pPr>
-            <a:r>
-              <a:rPr lang="en-US" sz="1100" b="1" spc="400" kern="0" dirty="0">
+            <a:pPr marL="0" indent="0">
+              <a:buNone/>
+            </a:pPr>
+            <a:r>
+              <a:rPr lang="en-US" sz="1100" b="1" kern="0" spc="400" dirty="0">
                 <a:solidFill>
                   <a:srgbClr val="DC822E"/>
                 </a:solidFill>
@@ -6782,7 +6944,7 @@
           <a:bodyPr wrap="square" lIns="0" tIns="0" rIns="0" bIns="0" rtlCol="0" anchor="t"/>
           <a:lstStyle/>
           <a:p>
-            <a:pPr indent="0" marL="0">
+            <a:pPr marL="0" indent="0">
               <a:buNone/>
             </a:pPr>
             <a:r>
@@ -6826,6 +6988,13 @@
             <a:prstDash val="solid"/>
           </a:ln>
         </p:spPr>
+        <p:txBody>
+          <a:bodyPr/>
+          <a:lstStyle/>
+          <a:p>
+            <a:endParaRPr lang="de-CH"/>
+          </a:p>
+        </p:txBody>
       </p:sp>
       <p:sp>
         <p:nvSpPr>
@@ -6848,7 +7017,7 @@
           <a:bodyPr wrap="square" lIns="0" tIns="0" rIns="0" bIns="0" rtlCol="0" anchor="ctr"/>
           <a:lstStyle/>
           <a:p>
-            <a:pPr algn="ctr" indent="0" marL="0">
+            <a:pPr marL="0" indent="0" algn="ctr">
               <a:buNone/>
             </a:pPr>
             <a:r>
@@ -6887,7 +7056,7 @@
           <a:bodyPr wrap="square" lIns="0" tIns="0" rIns="0" bIns="0" rtlCol="0" anchor="ctr"/>
           <a:lstStyle/>
           <a:p>
-            <a:pPr indent="0" marL="0">
+            <a:pPr marL="0" indent="0">
               <a:buNone/>
             </a:pPr>
             <a:r>
@@ -6931,6 +7100,13 @@
             <a:prstDash val="solid"/>
           </a:ln>
         </p:spPr>
+        <p:txBody>
+          <a:bodyPr/>
+          <a:lstStyle/>
+          <a:p>
+            <a:endParaRPr lang="de-CH"/>
+          </a:p>
+        </p:txBody>
       </p:sp>
       <p:sp>
         <p:nvSpPr>
@@ -6953,7 +7129,7 @@
           <a:bodyPr wrap="square" lIns="0" tIns="0" rIns="0" bIns="0" rtlCol="0" anchor="ctr"/>
           <a:lstStyle/>
           <a:p>
-            <a:pPr algn="ctr" indent="0" marL="0">
+            <a:pPr marL="0" indent="0" algn="ctr">
               <a:buNone/>
             </a:pPr>
             <a:r>
@@ -6992,7 +7168,7 @@
           <a:bodyPr wrap="square" lIns="0" tIns="0" rIns="0" bIns="0" rtlCol="0" anchor="ctr"/>
           <a:lstStyle/>
           <a:p>
-            <a:pPr indent="0" marL="0">
+            <a:pPr marL="0" indent="0">
               <a:buNone/>
             </a:pPr>
             <a:r>
@@ -7036,6 +7212,13 @@
             <a:prstDash val="solid"/>
           </a:ln>
         </p:spPr>
+        <p:txBody>
+          <a:bodyPr/>
+          <a:lstStyle/>
+          <a:p>
+            <a:endParaRPr lang="de-CH"/>
+          </a:p>
+        </p:txBody>
       </p:sp>
       <p:sp>
         <p:nvSpPr>
@@ -7058,7 +7241,7 @@
           <a:bodyPr wrap="square" lIns="0" tIns="0" rIns="0" bIns="0" rtlCol="0" anchor="ctr"/>
           <a:lstStyle/>
           <a:p>
-            <a:pPr algn="ctr" indent="0" marL="0">
+            <a:pPr marL="0" indent="0" algn="ctr">
               <a:buNone/>
             </a:pPr>
             <a:r>
@@ -7097,7 +7280,7 @@
           <a:bodyPr wrap="square" lIns="0" tIns="0" rIns="0" bIns="0" rtlCol="0" anchor="ctr"/>
           <a:lstStyle/>
           <a:p>
-            <a:pPr indent="0" marL="0">
+            <a:pPr marL="0" indent="0">
               <a:buNone/>
             </a:pPr>
             <a:r>
@@ -7141,6 +7324,13 @@
             <a:prstDash val="solid"/>
           </a:ln>
         </p:spPr>
+        <p:txBody>
+          <a:bodyPr/>
+          <a:lstStyle/>
+          <a:p>
+            <a:endParaRPr lang="de-CH"/>
+          </a:p>
+        </p:txBody>
       </p:sp>
       <p:sp>
         <p:nvSpPr>
@@ -7163,7 +7353,7 @@
           <a:bodyPr wrap="square" lIns="0" tIns="0" rIns="0" bIns="0" rtlCol="0" anchor="ctr"/>
           <a:lstStyle/>
           <a:p>
-            <a:pPr algn="ctr" indent="0" marL="0">
+            <a:pPr marL="0" indent="0" algn="ctr">
               <a:buNone/>
             </a:pPr>
             <a:r>
@@ -7202,7 +7392,7 @@
           <a:bodyPr wrap="square" lIns="0" tIns="0" rIns="0" bIns="0" rtlCol="0" anchor="ctr"/>
           <a:lstStyle/>
           <a:p>
-            <a:pPr indent="0" marL="0">
+            <a:pPr marL="0" indent="0">
               <a:buNone/>
             </a:pPr>
             <a:r>
@@ -7241,11 +7431,11 @@
           <a:bodyPr wrap="square" rtlCol="0" anchor="ctr"/>
           <a:lstStyle/>
           <a:p>
-            <a:pPr indent="0" marL="0">
-              <a:buNone/>
-            </a:pPr>
-            <a:r>
-              <a:rPr lang="en-US" sz="900" spc="200" kern="0" dirty="0">
+            <a:pPr marL="0" indent="0">
+              <a:buNone/>
+            </a:pPr>
+            <a:r>
+              <a:rPr lang="en-US" sz="900" kern="0" spc="200" dirty="0">
                 <a:solidFill>
                   <a:srgbClr val="F1ECDD"/>
                 </a:solidFill>
@@ -7280,7 +7470,7 @@
           <a:bodyPr wrap="square" rtlCol="0" anchor="ctr"/>
           <a:lstStyle/>
           <a:p>
-            <a:pPr algn="r" indent="0" marL="0">
+            <a:pPr marL="0" indent="0" algn="r">
               <a:buNone/>
             </a:pPr>
             <a:r>
@@ -7599,4 +7789,319 @@
     </a:ext>
   </a:extLst>
 </a:theme>
+</file>
+
+<file path=ppt/theme/theme2.xml><?xml version="1.0" encoding="utf-8"?>
+<a:theme xmlns:a="http://schemas.openxmlformats.org/drawingml/2006/main" name="Office">
+  <a:themeElements>
+    <a:clrScheme name="Office">
+      <a:dk1>
+        <a:sysClr val="windowText" lastClr="000000"/>
+      </a:dk1>
+      <a:lt1>
+        <a:sysClr val="window" lastClr="FFFFFF"/>
+      </a:lt1>
+      <a:dk2>
+        <a:srgbClr val="0E2841"/>
+      </a:dk2>
+      <a:lt2>
+        <a:srgbClr val="E8E8E8"/>
+      </a:lt2>
+      <a:accent1>
+        <a:srgbClr val="156082"/>
+      </a:accent1>
+      <a:accent2>
+        <a:srgbClr val="E97132"/>
+      </a:accent2>
+      <a:accent3>
+        <a:srgbClr val="196B24"/>
+      </a:accent3>
+      <a:accent4>
+        <a:srgbClr val="0F9ED5"/>
+      </a:accent4>
+      <a:accent5>
+        <a:srgbClr val="A02B93"/>
+      </a:accent5>
+      <a:accent6>
+        <a:srgbClr val="4EA72E"/>
+      </a:accent6>
+      <a:hlink>
+        <a:srgbClr val="467886"/>
+      </a:hlink>
+      <a:folHlink>
+        <a:srgbClr val="96607D"/>
+      </a:folHlink>
+    </a:clrScheme>
+    <a:fontScheme name="Office">
+      <a:majorFont>
+        <a:latin typeface="Aptos Display" panose="02110004020202020204"/>
+        <a:ea typeface=""/>
+        <a:cs typeface=""/>
+        <a:font script="Jpan" typeface="游ゴシック Light"/>
+        <a:font script="Hang" typeface="맑은 고딕"/>
+        <a:font script="Hans" typeface="等线 Light"/>
+        <a:font script="Hant" typeface="新細明體"/>
+        <a:font script="Arab" typeface="Times New Roman"/>
+        <a:font script="Hebr" typeface="Times New Roman"/>
+        <a:font script="Thai" typeface="Angsana New"/>
+        <a:font script="Ethi" typeface="Nyala"/>
+        <a:font script="Beng" typeface="Vrinda"/>
+        <a:font script="Gujr" typeface="Shruti"/>
+        <a:font script="Khmr" typeface="MoolBoran"/>
+        <a:font script="Knda" typeface="Tunga"/>
+        <a:font script="Guru" typeface="Raavi"/>
+        <a:font script="Cans" typeface="Euphemia"/>
+        <a:font script="Cher" typeface="Plantagenet Cherokee"/>
+        <a:font script="Yiii" typeface="Microsoft Yi Baiti"/>
+        <a:font script="Tibt" typeface="Microsoft Himalaya"/>
+        <a:font script="Thaa" typeface="MV Boli"/>
+        <a:font script="Deva" typeface="Mangal"/>
+        <a:font script="Telu" typeface="Gautami"/>
+        <a:font script="Taml" typeface="Latha"/>
+        <a:font script="Syrc" typeface="Estrangelo Edessa"/>
+        <a:font script="Orya" typeface="Kalinga"/>
+        <a:font script="Mlym" typeface="Kartika"/>
+        <a:font script="Laoo" typeface="DokChampa"/>
+        <a:font script="Sinh" typeface="Iskoola Pota"/>
+        <a:font script="Mong" typeface="Mongolian Baiti"/>
+        <a:font script="Viet" typeface="Times New Roman"/>
+        <a:font script="Uigh" typeface="Microsoft Uighur"/>
+        <a:font script="Geor" typeface="Sylfaen"/>
+        <a:font script="Armn" typeface="Arial"/>
+        <a:font script="Bugi" typeface="Leelawadee UI"/>
+        <a:font script="Bopo" typeface="Microsoft JhengHei"/>
+        <a:font script="Java" typeface="Javanese Text"/>
+        <a:font script="Lisu" typeface="Segoe UI"/>
+        <a:font script="Mymr" typeface="Myanmar Text"/>
+        <a:font script="Nkoo" typeface="Ebrima"/>
+        <a:font script="Olck" typeface="Nirmala UI"/>
+        <a:font script="Osma" typeface="Ebrima"/>
+        <a:font script="Phag" typeface="Phagspa"/>
+        <a:font script="Syrn" typeface="Estrangelo Edessa"/>
+        <a:font script="Syrj" typeface="Estrangelo Edessa"/>
+        <a:font script="Syre" typeface="Estrangelo Edessa"/>
+        <a:font script="Sora" typeface="Nirmala UI"/>
+        <a:font script="Tale" typeface="Microsoft Tai Le"/>
+        <a:font script="Talu" typeface="Microsoft New Tai Lue"/>
+        <a:font script="Tfng" typeface="Ebrima"/>
+      </a:majorFont>
+      <a:minorFont>
+        <a:latin typeface="Aptos" panose="02110004020202020204"/>
+        <a:ea typeface=""/>
+        <a:cs typeface=""/>
+        <a:font script="Jpan" typeface="游ゴシック"/>
+        <a:font script="Hang" typeface="맑은 고딕"/>
+        <a:font script="Hans" typeface="等线"/>
+        <a:font script="Hant" typeface="新細明體"/>
+        <a:font script="Arab" typeface="Arial"/>
+        <a:font script="Hebr" typeface="Arial"/>
+        <a:font script="Thai" typeface="Cordia New"/>
+        <a:font script="Ethi" typeface="Nyala"/>
+        <a:font script="Beng" typeface="Vrinda"/>
+        <a:font script="Gujr" typeface="Shruti"/>
+        <a:font script="Khmr" typeface="DaunPenh"/>
+        <a:font script="Knda" typeface="Tunga"/>
+        <a:font script="Guru" typeface="Raavi"/>
+        <a:font script="Cans" typeface="Euphemia"/>
+        <a:font script="Cher" typeface="Plantagenet Cherokee"/>
+        <a:font script="Yiii" typeface="Microsoft Yi Baiti"/>
+        <a:font script="Tibt" typeface="Microsoft Himalaya"/>
+        <a:font script="Thaa" typeface="MV Boli"/>
+        <a:font script="Deva" typeface="Mangal"/>
+        <a:font script="Telu" typeface="Gautami"/>
+        <a:font script="Taml" typeface="Latha"/>
+        <a:font script="Syrc" typeface="Estrangelo Edessa"/>
+        <a:font script="Orya" typeface="Kalinga"/>
+        <a:font script="Mlym" typeface="Kartika"/>
+        <a:font script="Laoo" typeface="DokChampa"/>
+        <a:font script="Sinh" typeface="Iskoola Pota"/>
+        <a:font script="Mong" typeface="Mongolian Baiti"/>
+        <a:font script="Viet" typeface="Arial"/>
+        <a:font script="Uigh" typeface="Microsoft Uighur"/>
+        <a:font script="Geor" typeface="Sylfaen"/>
+        <a:font script="Armn" typeface="Arial"/>
+        <a:font script="Bugi" typeface="Leelawadee UI"/>
+        <a:font script="Bopo" typeface="Microsoft JhengHei"/>
+        <a:font script="Java" typeface="Javanese Text"/>
+        <a:font script="Lisu" typeface="Segoe UI"/>
+        <a:font script="Mymr" typeface="Myanmar Text"/>
+        <a:font script="Nkoo" typeface="Ebrima"/>
+        <a:font script="Olck" typeface="Nirmala UI"/>
+        <a:font script="Osma" typeface="Ebrima"/>
+        <a:font script="Phag" typeface="Phagspa"/>
+        <a:font script="Syrn" typeface="Estrangelo Edessa"/>
+        <a:font script="Syrj" typeface="Estrangelo Edessa"/>
+        <a:font script="Syre" typeface="Estrangelo Edessa"/>
+        <a:font script="Sora" typeface="Nirmala UI"/>
+        <a:font script="Tale" typeface="Microsoft Tai Le"/>
+        <a:font script="Talu" typeface="Microsoft New Tai Lue"/>
+        <a:font script="Tfng" typeface="Ebrima"/>
+      </a:minorFont>
+    </a:fontScheme>
+    <a:fmtScheme name="Office">
+      <a:fillStyleLst>
+        <a:solidFill>
+          <a:schemeClr val="phClr"/>
+        </a:solidFill>
+        <a:gradFill rotWithShape="1">
+          <a:gsLst>
+            <a:gs pos="0">
+              <a:schemeClr val="phClr">
+                <a:lumMod val="110000"/>
+                <a:satMod val="105000"/>
+                <a:tint val="67000"/>
+              </a:schemeClr>
+            </a:gs>
+            <a:gs pos="50000">
+              <a:schemeClr val="phClr">
+                <a:lumMod val="105000"/>
+                <a:satMod val="103000"/>
+                <a:tint val="73000"/>
+              </a:schemeClr>
+            </a:gs>
+            <a:gs pos="100000">
+              <a:schemeClr val="phClr">
+                <a:lumMod val="105000"/>
+                <a:satMod val="109000"/>
+                <a:tint val="81000"/>
+              </a:schemeClr>
+            </a:gs>
+          </a:gsLst>
+          <a:lin ang="5400000" scaled="0"/>
+        </a:gradFill>
+        <a:gradFill rotWithShape="1">
+          <a:gsLst>
+            <a:gs pos="0">
+              <a:schemeClr val="phClr">
+                <a:satMod val="103000"/>
+                <a:lumMod val="102000"/>
+                <a:tint val="94000"/>
+              </a:schemeClr>
+            </a:gs>
+            <a:gs pos="50000">
+              <a:schemeClr val="phClr">
+                <a:satMod val="110000"/>
+                <a:lumMod val="100000"/>
+                <a:shade val="100000"/>
+              </a:schemeClr>
+            </a:gs>
+            <a:gs pos="100000">
+              <a:schemeClr val="phClr">
+                <a:lumMod val="99000"/>
+                <a:satMod val="120000"/>
+                <a:shade val="78000"/>
+              </a:schemeClr>
+            </a:gs>
+          </a:gsLst>
+          <a:lin ang="5400000" scaled="0"/>
+        </a:gradFill>
+      </a:fillStyleLst>
+      <a:lnStyleLst>
+        <a:ln w="12700" cap="flat" cmpd="sng" algn="ctr">
+          <a:solidFill>
+            <a:schemeClr val="phClr"/>
+          </a:solidFill>
+          <a:prstDash val="solid"/>
+          <a:miter lim="800000"/>
+        </a:ln>
+        <a:ln w="19050" cap="flat" cmpd="sng" algn="ctr">
+          <a:solidFill>
+            <a:schemeClr val="phClr"/>
+          </a:solidFill>
+          <a:prstDash val="solid"/>
+          <a:miter lim="800000"/>
+        </a:ln>
+        <a:ln w="25400" cap="flat" cmpd="sng" algn="ctr">
+          <a:solidFill>
+            <a:schemeClr val="phClr"/>
+          </a:solidFill>
+          <a:prstDash val="solid"/>
+          <a:miter lim="800000"/>
+        </a:ln>
+      </a:lnStyleLst>
+      <a:effectStyleLst>
+        <a:effectStyle>
+          <a:effectLst/>
+        </a:effectStyle>
+        <a:effectStyle>
+          <a:effectLst/>
+        </a:effectStyle>
+        <a:effectStyle>
+          <a:effectLst>
+            <a:outerShdw blurRad="57150" dist="19050" dir="5400000" algn="ctr" rotWithShape="0">
+              <a:srgbClr val="000000">
+                <a:alpha val="63000"/>
+              </a:srgbClr>
+            </a:outerShdw>
+          </a:effectLst>
+        </a:effectStyle>
+      </a:effectStyleLst>
+      <a:bgFillStyleLst>
+        <a:solidFill>
+          <a:schemeClr val="phClr"/>
+        </a:solidFill>
+        <a:solidFill>
+          <a:schemeClr val="phClr">
+            <a:tint val="95000"/>
+            <a:satMod val="170000"/>
+          </a:schemeClr>
+        </a:solidFill>
+        <a:gradFill rotWithShape="1">
+          <a:gsLst>
+            <a:gs pos="0">
+              <a:schemeClr val="phClr">
+                <a:tint val="93000"/>
+                <a:satMod val="150000"/>
+                <a:shade val="98000"/>
+                <a:lumMod val="102000"/>
+              </a:schemeClr>
+            </a:gs>
+            <a:gs pos="50000">
+              <a:schemeClr val="phClr">
+                <a:tint val="98000"/>
+                <a:satMod val="130000"/>
+                <a:shade val="90000"/>
+                <a:lumMod val="103000"/>
+              </a:schemeClr>
+            </a:gs>
+            <a:gs pos="100000">
+              <a:schemeClr val="phClr">
+                <a:shade val="63000"/>
+                <a:satMod val="120000"/>
+              </a:schemeClr>
+            </a:gs>
+          </a:gsLst>
+          <a:lin ang="5400000" scaled="0"/>
+        </a:gradFill>
+      </a:bgFillStyleLst>
+    </a:fmtScheme>
+  </a:themeElements>
+  <a:objectDefaults>
+    <a:lnDef>
+      <a:spPr/>
+      <a:bodyPr/>
+      <a:lstStyle/>
+      <a:style>
+        <a:lnRef idx="2">
+          <a:schemeClr val="accent1"/>
+        </a:lnRef>
+        <a:fillRef idx="0">
+          <a:schemeClr val="accent1"/>
+        </a:fillRef>
+        <a:effectRef idx="1">
+          <a:schemeClr val="accent1"/>
+        </a:effectRef>
+        <a:fontRef idx="minor">
+          <a:schemeClr val="tx1"/>
+        </a:fontRef>
+      </a:style>
+    </a:lnDef>
+  </a:objectDefaults>
+  <a:extraClrSchemeLst/>
+  <a:extLst>
+    <a:ext uri="{05A4C25C-085E-4340-85A3-A5531E510DB2}">
+      <thm15:themeFamily xmlns:thm15="http://schemas.microsoft.com/office/thememl/2012/main" name="Office Theme" id="{2E142A2C-CD16-42D6-873A-C26D2A0506FA}" vid="{1BDDFF52-6CD6-40A5-AB3C-68EB2F1E4D0A}"/>
+    </a:ext>
+  </a:extLst>
+</a:theme>
 </file>